--- a/docs/content/power_and_error/power_and_error_lecture.pptx
+++ b/docs/content/power_and_error/power_and_error_lecture.pptx
@@ -35,6 +35,8 @@
     <p:sldId id="283" r:id="rId29"/>
     <p:sldId id="284" r:id="rId30"/>
     <p:sldId id="285" r:id="rId31"/>
+    <p:sldId id="286" r:id="rId32"/>
+    <p:sldId id="287" r:id="rId33"/>
   </p:sldIdLst>
   <p:sldSz cx="9144000" cy="5143500" type="screen16x9"/>
   <p:notesSz cx="6858000" cy="9144000"/>
@@ -4251,7 +4253,7 @@
       </p:sp>
       <p:pic>
         <p:nvPicPr>
-          <p:cNvPr descr="power_and_error_lecture_files/figure-pptx/unnamed-chunk-1-1.png" id="0" name="Picture 1"/>
+          <p:cNvPr descr="power_and_error_lecture_files/figure-pptx/power-and-error-01-1.png" id="0" name="Picture 1"/>
           <p:cNvPicPr>
             <a:picLocks noGrp="1" noChangeAspect="1"/>
           </p:cNvPicPr>
@@ -5688,7 +5690,7 @@
       </p:sp>
       <p:pic>
         <p:nvPicPr>
-          <p:cNvPr descr="power_and_error_lecture_files/figure-pptx/unnamed-chunk-2-1.png" id="0" name="Picture 1"/>
+          <p:cNvPr descr="power_and_error_lecture_files/figure-pptx/power-and-error-02-1.png" id="0" name="Picture 1"/>
           <p:cNvPicPr>
             <a:picLocks noGrp="1" noChangeAspect="1"/>
           </p:cNvPicPr>
@@ -5919,25 +5921,6 @@
               <a:t>(tidyverse)</a:t>
             </a:r>
             <a:br/>
-            <a:r>
-              <a:rPr>
-                <a:solidFill>
-                  <a:srgbClr val="4758AB"/>
-                </a:solidFill>
-                <a:latin typeface="Courier"/>
-              </a:rPr>
-              <a:t>library</a:t>
-            </a:r>
-            <a:r>
-              <a:rPr>
-                <a:solidFill>
-                  <a:srgbClr val="003B4F"/>
-                </a:solidFill>
-                <a:latin typeface="Courier"/>
-              </a:rPr>
-              <a:t>(readxl)</a:t>
-            </a:r>
-            <a:br/>
             <a:br/>
             <a:r>
               <a:rPr>
@@ -7105,7 +7088,7 @@
                 </a:solidFill>
                 <a:latin typeface="Courier"/>
               </a:rPr>
-              <a:t>pine_switch_df &lt;- </a:t>
+              <a:t>pine_df &lt;- </a:t>
             </a:r>
             <a:r>
               <a:rPr>
@@ -7114,7 +7097,7 @@
                 </a:solidFill>
                 <a:latin typeface="Courier"/>
               </a:rPr>
-              <a:t>read_excel</a:t>
+              <a:t>read_csv</a:t>
             </a:r>
             <a:r>
               <a:rPr>
@@ -7132,7 +7115,7 @@
                 </a:solidFill>
                 <a:latin typeface="Courier"/>
               </a:rPr>
-              <a:t>"data/class_pine needle length switched.xlsx"</a:t>
+              <a:t>"data/pine_data.csv"</a:t>
             </a:r>
             <a:r>
               <a:rPr>
@@ -7142,174 +7125,111 @@
                 <a:latin typeface="Courier"/>
               </a:rPr>
               <a:t>)</a:t>
-            </a:r>
-            <a:br/>
-            <a:r>
-              <a:rPr>
-                <a:solidFill>
-                  <a:srgbClr val="003B4F"/>
-                </a:solidFill>
-                <a:latin typeface="Courier"/>
-              </a:rPr>
-              <a:t>ps_df &lt;- pine_switch_df </a:t>
-            </a:r>
-            <a:r>
-              <a:rPr>
-                <a:solidFill>
-                  <a:srgbClr val="5E5E5E"/>
-                </a:solidFill>
-                <a:latin typeface="Courier"/>
-              </a:rPr>
-              <a:t>%&gt;%</a:t>
-            </a:r>
-            <a:br/>
-            <a:r>
-              <a:rPr>
-                <a:solidFill>
-                  <a:srgbClr val="003B4F"/>
-                </a:solidFill>
-                <a:latin typeface="Courier"/>
-              </a:rPr>
-              <a:t>  </a:t>
-            </a:r>
-            <a:r>
-              <a:rPr>
-                <a:solidFill>
-                  <a:srgbClr val="4758AB"/>
-                </a:solidFill>
-                <a:latin typeface="Courier"/>
-              </a:rPr>
-              <a:t>group_by</a:t>
-            </a:r>
-            <a:r>
-              <a:rPr>
-                <a:solidFill>
-                  <a:srgbClr val="003B4F"/>
-                </a:solidFill>
-                <a:latin typeface="Courier"/>
-              </a:rPr>
-              <a:t>(group, tree_no, tree_char, side) </a:t>
-            </a:r>
-            <a:r>
-              <a:rPr>
-                <a:solidFill>
-                  <a:srgbClr val="5E5E5E"/>
-                </a:solidFill>
-                <a:latin typeface="Courier"/>
-              </a:rPr>
-              <a:t>%&gt;%</a:t>
-            </a:r>
-            <a:br/>
-            <a:r>
-              <a:rPr>
-                <a:solidFill>
-                  <a:srgbClr val="003B4F"/>
-                </a:solidFill>
-                <a:latin typeface="Courier"/>
-              </a:rPr>
-              <a:t>  </a:t>
-            </a:r>
-            <a:r>
-              <a:rPr>
-                <a:solidFill>
-                  <a:srgbClr val="4758AB"/>
-                </a:solidFill>
-                <a:latin typeface="Courier"/>
-              </a:rPr>
-              <a:t>summarise</a:t>
-            </a:r>
-            <a:r>
-              <a:rPr>
-                <a:solidFill>
-                  <a:srgbClr val="003B4F"/>
-                </a:solidFill>
-                <a:latin typeface="Courier"/>
-              </a:rPr>
-              <a:t>(</a:t>
-            </a:r>
-            <a:r>
-              <a:rPr>
-                <a:solidFill>
-                  <a:srgbClr val="657422"/>
-                </a:solidFill>
-                <a:latin typeface="Courier"/>
-              </a:rPr>
-              <a:t>length_mm =</a:t>
-            </a:r>
-            <a:r>
-              <a:rPr>
-                <a:solidFill>
-                  <a:srgbClr val="003B4F"/>
-                </a:solidFill>
-                <a:latin typeface="Courier"/>
-              </a:rPr>
-              <a:t> </a:t>
-            </a:r>
-            <a:r>
-              <a:rPr>
-                <a:solidFill>
-                  <a:srgbClr val="4758AB"/>
-                </a:solidFill>
-                <a:latin typeface="Courier"/>
-              </a:rPr>
-              <a:t>mean</a:t>
-            </a:r>
-            <a:r>
-              <a:rPr>
-                <a:solidFill>
-                  <a:srgbClr val="003B4F"/>
-                </a:solidFill>
-                <a:latin typeface="Courier"/>
-              </a:rPr>
-              <a:t>(length_mm, </a:t>
-            </a:r>
-            <a:r>
-              <a:rPr>
-                <a:solidFill>
-                  <a:srgbClr val="657422"/>
-                </a:solidFill>
-                <a:latin typeface="Courier"/>
-              </a:rPr>
-              <a:t>na.rm=</a:t>
-            </a:r>
-            <a:r>
-              <a:rPr>
-                <a:solidFill>
-                  <a:srgbClr val="8F5902"/>
-                </a:solidFill>
-                <a:latin typeface="Courier"/>
-              </a:rPr>
-              <a:t>TRUE</a:t>
-            </a:r>
-            <a:r>
-              <a:rPr>
-                <a:solidFill>
-                  <a:srgbClr val="003B4F"/>
-                </a:solidFill>
-                <a:latin typeface="Courier"/>
-              </a:rPr>
-              <a:t>))</a:t>
             </a:r>
             <a:br/>
             <a:br/>
             <a:r>
               <a:rPr>
                 <a:solidFill>
-                  <a:srgbClr val="003B4F"/>
-                </a:solidFill>
-                <a:latin typeface="Courier"/>
-              </a:rPr>
-              <a:t>ps_shady_df &lt;- ps_df </a:t>
-            </a:r>
-            <a:r>
-              <a:rPr>
-                <a:solidFill>
                   <a:srgbClr val="5E5E5E"/>
                 </a:solidFill>
                 <a:latin typeface="Courier"/>
               </a:rPr>
+              <a:t># the two-stage summary again: one value per tree per side</a:t>
+            </a:r>
+            <a:br/>
+            <a:r>
+              <a:rPr>
+                <a:solidFill>
+                  <a:srgbClr val="003B4F"/>
+                </a:solidFill>
+                <a:latin typeface="Courier"/>
+              </a:rPr>
+              <a:t>p_df &lt;- pine_df </a:t>
+            </a:r>
+            <a:r>
+              <a:rPr>
+                <a:solidFill>
+                  <a:srgbClr val="5E5E5E"/>
+                </a:solidFill>
+                <a:latin typeface="Courier"/>
+              </a:rPr>
               <a:t>%&gt;%</a:t>
             </a:r>
+            <a:br/>
+            <a:r>
+              <a:rPr>
+                <a:solidFill>
+                  <a:srgbClr val="003B4F"/>
+                </a:solidFill>
+                <a:latin typeface="Courier"/>
+              </a:rPr>
+              <a:t>  </a:t>
+            </a:r>
+            <a:r>
+              <a:rPr>
+                <a:solidFill>
+                  <a:srgbClr val="4758AB"/>
+                </a:solidFill>
+                <a:latin typeface="Courier"/>
+              </a:rPr>
+              <a:t>group_by</a:t>
+            </a:r>
+            <a:r>
+              <a:rPr>
+                <a:solidFill>
+                  <a:srgbClr val="003B4F"/>
+                </a:solidFill>
+                <a:latin typeface="Courier"/>
+              </a:rPr>
+              <a:t>(team, side) </a:t>
+            </a:r>
+            <a:r>
+              <a:rPr>
+                <a:solidFill>
+                  <a:srgbClr val="5E5E5E"/>
+                </a:solidFill>
+                <a:latin typeface="Courier"/>
+              </a:rPr>
+              <a:t>%&gt;%</a:t>
+            </a:r>
+            <a:br/>
+            <a:r>
+              <a:rPr>
+                <a:solidFill>
+                  <a:srgbClr val="003B4F"/>
+                </a:solidFill>
+                <a:latin typeface="Courier"/>
+              </a:rPr>
+              <a:t>  </a:t>
+            </a:r>
+            <a:r>
+              <a:rPr>
+                <a:solidFill>
+                  <a:srgbClr val="4758AB"/>
+                </a:solidFill>
+                <a:latin typeface="Courier"/>
+              </a:rPr>
+              <a:t>summarise</a:t>
+            </a:r>
+            <a:r>
+              <a:rPr>
+                <a:solidFill>
+                  <a:srgbClr val="003B4F"/>
+                </a:solidFill>
+                <a:latin typeface="Courier"/>
+              </a:rPr>
+              <a:t>(</a:t>
+            </a:r>
+            <a:r>
+              <a:rPr>
+                <a:solidFill>
+                  <a:srgbClr val="657422"/>
+                </a:solidFill>
+                <a:latin typeface="Courier"/>
+              </a:rPr>
+              <a:t>needle_length_mm =</a:t>
+            </a:r>
             <a:r>
               <a:rPr>
                 <a:solidFill>
@@ -7326,25 +7246,25 @@
                 </a:solidFill>
                 <a:latin typeface="Courier"/>
               </a:rPr>
-              <a:t>filter</a:t>
-            </a:r>
-            <a:r>
-              <a:rPr>
-                <a:solidFill>
-                  <a:srgbClr val="003B4F"/>
-                </a:solidFill>
-                <a:latin typeface="Courier"/>
-              </a:rPr>
-              <a:t>(side </a:t>
-            </a:r>
-            <a:r>
-              <a:rPr>
-                <a:solidFill>
-                  <a:srgbClr val="5E5E5E"/>
-                </a:solidFill>
-                <a:latin typeface="Courier"/>
-              </a:rPr>
-              <a:t>==</a:t>
+              <a:t>mean</a:t>
+            </a:r>
+            <a:r>
+              <a:rPr>
+                <a:solidFill>
+                  <a:srgbClr val="003B4F"/>
+                </a:solidFill>
+                <a:latin typeface="Courier"/>
+              </a:rPr>
+              <a:t>(needle_length_mm, </a:t>
+            </a:r>
+            <a:r>
+              <a:rPr>
+                <a:solidFill>
+                  <a:srgbClr val="657422"/>
+                </a:solidFill>
+                <a:latin typeface="Courier"/>
+              </a:rPr>
+              <a:t>na.rm =</a:t>
             </a:r>
             <a:r>
               <a:rPr>
@@ -7358,93 +7278,57 @@
             <a:r>
               <a:rPr>
                 <a:solidFill>
+                  <a:srgbClr val="8F5902"/>
+                </a:solidFill>
+                <a:latin typeface="Courier"/>
+              </a:rPr>
+              <a:t>TRUE</a:t>
+            </a:r>
+            <a:r>
+              <a:rPr>
+                <a:solidFill>
+                  <a:srgbClr val="003B4F"/>
+                </a:solidFill>
+                <a:latin typeface="Courier"/>
+              </a:rPr>
+              <a:t>),</a:t>
+            </a:r>
+            <a:br/>
+            <a:r>
+              <a:rPr>
+                <a:solidFill>
+                  <a:srgbClr val="003B4F"/>
+                </a:solidFill>
+                <a:latin typeface="Courier"/>
+              </a:rPr>
+              <a:t>            </a:t>
+            </a:r>
+            <a:r>
+              <a:rPr>
+                <a:solidFill>
+                  <a:srgbClr val="657422"/>
+                </a:solidFill>
+                <a:latin typeface="Courier"/>
+              </a:rPr>
+              <a:t>.groups =</a:t>
+            </a:r>
+            <a:r>
+              <a:rPr>
+                <a:solidFill>
+                  <a:srgbClr val="003B4F"/>
+                </a:solidFill>
+                <a:latin typeface="Courier"/>
+              </a:rPr>
+              <a:t> </a:t>
+            </a:r>
+            <a:r>
+              <a:rPr>
+                <a:solidFill>
                   <a:srgbClr val="20794D"/>
                 </a:solidFill>
                 <a:latin typeface="Courier"/>
               </a:rPr>
-              <a:t>"shady"</a:t>
-            </a:r>
-            <a:r>
-              <a:rPr>
-                <a:solidFill>
-                  <a:srgbClr val="003B4F"/>
-                </a:solidFill>
-                <a:latin typeface="Courier"/>
-              </a:rPr>
-              <a:t>)</a:t>
-            </a:r>
-            <a:br/>
-            <a:r>
-              <a:rPr>
-                <a:solidFill>
-                  <a:srgbClr val="003B4F"/>
-                </a:solidFill>
-                <a:latin typeface="Courier"/>
-              </a:rPr>
-              <a:t>ps_sunny_df &lt;- ps_df </a:t>
-            </a:r>
-            <a:r>
-              <a:rPr>
-                <a:solidFill>
-                  <a:srgbClr val="5E5E5E"/>
-                </a:solidFill>
-                <a:latin typeface="Courier"/>
-              </a:rPr>
-              <a:t>%&gt;%</a:t>
-            </a:r>
-            <a:r>
-              <a:rPr>
-                <a:solidFill>
-                  <a:srgbClr val="003B4F"/>
-                </a:solidFill>
-                <a:latin typeface="Courier"/>
-              </a:rPr>
-              <a:t> </a:t>
-            </a:r>
-            <a:r>
-              <a:rPr>
-                <a:solidFill>
-                  <a:srgbClr val="4758AB"/>
-                </a:solidFill>
-                <a:latin typeface="Courier"/>
-              </a:rPr>
-              <a:t>filter</a:t>
-            </a:r>
-            <a:r>
-              <a:rPr>
-                <a:solidFill>
-                  <a:srgbClr val="003B4F"/>
-                </a:solidFill>
-                <a:latin typeface="Courier"/>
-              </a:rPr>
-              <a:t>(side </a:t>
-            </a:r>
-            <a:r>
-              <a:rPr>
-                <a:solidFill>
-                  <a:srgbClr val="5E5E5E"/>
-                </a:solidFill>
-                <a:latin typeface="Courier"/>
-              </a:rPr>
-              <a:t>==</a:t>
-            </a:r>
-            <a:r>
-              <a:rPr>
-                <a:solidFill>
-                  <a:srgbClr val="003B4F"/>
-                </a:solidFill>
-                <a:latin typeface="Courier"/>
-              </a:rPr>
-              <a:t> </a:t>
-            </a:r>
-            <a:r>
-              <a:rPr>
-                <a:solidFill>
-                  <a:srgbClr val="20794D"/>
-                </a:solidFill>
-                <a:latin typeface="Courier"/>
-              </a:rPr>
-              <a:t>"sunny"</a:t>
+              <a:t>"drop"</a:t>
             </a:r>
             <a:r>
               <a:rPr>
@@ -7464,16 +7348,161 @@
                 </a:solidFill>
                 <a:latin typeface="Courier"/>
               </a:rPr>
-              <a:t>pine_alpha &lt;- </a:t>
-            </a:r>
-            <a:r>
-              <a:rPr>
-                <a:solidFill>
-                  <a:srgbClr val="AD0000"/>
-                </a:solidFill>
-                <a:latin typeface="Courier"/>
-              </a:rPr>
-              <a:t>0.05</a:t>
+              <a:t>shady_df &lt;- p_df </a:t>
+            </a:r>
+            <a:r>
+              <a:rPr>
+                <a:solidFill>
+                  <a:srgbClr val="5E5E5E"/>
+                </a:solidFill>
+                <a:latin typeface="Courier"/>
+              </a:rPr>
+              <a:t>%&gt;%</a:t>
+            </a:r>
+            <a:r>
+              <a:rPr>
+                <a:solidFill>
+                  <a:srgbClr val="003B4F"/>
+                </a:solidFill>
+                <a:latin typeface="Courier"/>
+              </a:rPr>
+              <a:t> </a:t>
+            </a:r>
+            <a:r>
+              <a:rPr>
+                <a:solidFill>
+                  <a:srgbClr val="4758AB"/>
+                </a:solidFill>
+                <a:latin typeface="Courier"/>
+              </a:rPr>
+              <a:t>filter</a:t>
+            </a:r>
+            <a:r>
+              <a:rPr>
+                <a:solidFill>
+                  <a:srgbClr val="003B4F"/>
+                </a:solidFill>
+                <a:latin typeface="Courier"/>
+              </a:rPr>
+              <a:t>(side </a:t>
+            </a:r>
+            <a:r>
+              <a:rPr>
+                <a:solidFill>
+                  <a:srgbClr val="5E5E5E"/>
+                </a:solidFill>
+                <a:latin typeface="Courier"/>
+              </a:rPr>
+              <a:t>==</a:t>
+            </a:r>
+            <a:r>
+              <a:rPr>
+                <a:solidFill>
+                  <a:srgbClr val="003B4F"/>
+                </a:solidFill>
+                <a:latin typeface="Courier"/>
+              </a:rPr>
+              <a:t> </a:t>
+            </a:r>
+            <a:r>
+              <a:rPr>
+                <a:solidFill>
+                  <a:srgbClr val="20794D"/>
+                </a:solidFill>
+                <a:latin typeface="Courier"/>
+              </a:rPr>
+              <a:t>"shady"</a:t>
+            </a:r>
+            <a:r>
+              <a:rPr>
+                <a:solidFill>
+                  <a:srgbClr val="003B4F"/>
+                </a:solidFill>
+                <a:latin typeface="Courier"/>
+              </a:rPr>
+              <a:t>)</a:t>
+            </a:r>
+            <a:br/>
+            <a:r>
+              <a:rPr>
+                <a:solidFill>
+                  <a:srgbClr val="003B4F"/>
+                </a:solidFill>
+                <a:latin typeface="Courier"/>
+              </a:rPr>
+              <a:t>sunny_df &lt;- p_df </a:t>
+            </a:r>
+            <a:r>
+              <a:rPr>
+                <a:solidFill>
+                  <a:srgbClr val="5E5E5E"/>
+                </a:solidFill>
+                <a:latin typeface="Courier"/>
+              </a:rPr>
+              <a:t>%&gt;%</a:t>
+            </a:r>
+            <a:r>
+              <a:rPr>
+                <a:solidFill>
+                  <a:srgbClr val="003B4F"/>
+                </a:solidFill>
+                <a:latin typeface="Courier"/>
+              </a:rPr>
+              <a:t> </a:t>
+            </a:r>
+            <a:r>
+              <a:rPr>
+                <a:solidFill>
+                  <a:srgbClr val="4758AB"/>
+                </a:solidFill>
+                <a:latin typeface="Courier"/>
+              </a:rPr>
+              <a:t>filter</a:t>
+            </a:r>
+            <a:r>
+              <a:rPr>
+                <a:solidFill>
+                  <a:srgbClr val="003B4F"/>
+                </a:solidFill>
+                <a:latin typeface="Courier"/>
+              </a:rPr>
+              <a:t>(side </a:t>
+            </a:r>
+            <a:r>
+              <a:rPr>
+                <a:solidFill>
+                  <a:srgbClr val="5E5E5E"/>
+                </a:solidFill>
+                <a:latin typeface="Courier"/>
+              </a:rPr>
+              <a:t>==</a:t>
+            </a:r>
+            <a:r>
+              <a:rPr>
+                <a:solidFill>
+                  <a:srgbClr val="003B4F"/>
+                </a:solidFill>
+                <a:latin typeface="Courier"/>
+              </a:rPr>
+              <a:t> </a:t>
+            </a:r>
+            <a:r>
+              <a:rPr>
+                <a:solidFill>
+                  <a:srgbClr val="20794D"/>
+                </a:solidFill>
+                <a:latin typeface="Courier"/>
+              </a:rPr>
+              <a:t>"sunny"</a:t>
+            </a:r>
+            <a:r>
+              <a:rPr>
+                <a:solidFill>
+                  <a:srgbClr val="003B4F"/>
+                </a:solidFill>
+                <a:latin typeface="Courier"/>
+              </a:rPr>
+              <a:t>)</a:t>
             </a:r>
             <a:br/>
             <a:br/>
@@ -7484,7 +7513,7 @@
                 </a:solidFill>
                 <a:latin typeface="Courier"/>
               </a:rPr>
-              <a:t>pine_n1 &lt;- </a:t>
+              <a:t>pine_n &lt;- </a:t>
             </a:r>
             <a:r>
               <a:rPr>
@@ -7502,35 +7531,7 @@
                 </a:solidFill>
                 <a:latin typeface="Courier"/>
               </a:rPr>
-              <a:t>(ps_shady_df)</a:t>
-            </a:r>
-            <a:br/>
-            <a:r>
-              <a:rPr>
-                <a:solidFill>
-                  <a:srgbClr val="003B4F"/>
-                </a:solidFill>
-                <a:latin typeface="Courier"/>
-              </a:rPr>
-              <a:t>pine_n2 &lt;- </a:t>
-            </a:r>
-            <a:r>
-              <a:rPr>
-                <a:solidFill>
-                  <a:srgbClr val="4758AB"/>
-                </a:solidFill>
-                <a:latin typeface="Courier"/>
-              </a:rPr>
-              <a:t>nrow</a:t>
-            </a:r>
-            <a:r>
-              <a:rPr>
-                <a:solidFill>
-                  <a:srgbClr val="003B4F"/>
-                </a:solidFill>
-                <a:latin typeface="Courier"/>
-              </a:rPr>
-              <a:t>(ps_sunny_df)</a:t>
+              <a:t>(shady_df)</a:t>
             </a:r>
             <a:br/>
             <a:br/>
@@ -7577,7 +7578,7 @@
                 </a:solidFill>
                 <a:latin typeface="Courier"/>
               </a:rPr>
-              <a:t>(ps_shady_df</a:t>
+              <a:t>(shady_df</a:t>
             </a:r>
             <a:r>
               <a:rPr>
@@ -7595,7 +7596,7 @@
                 </a:solidFill>
                 <a:latin typeface="Courier"/>
               </a:rPr>
-              <a:t>length_mm) </a:t>
+              <a:t>needle_length_mm) </a:t>
             </a:r>
             <a:r>
               <a:rPr>
@@ -7613,7 +7614,25 @@
                 </a:solidFill>
                 <a:latin typeface="Courier"/>
               </a:rPr>
-              <a:t> (pine_n1</a:t>
+              <a:t> (pine_n </a:t>
+            </a:r>
+            <a:r>
+              <a:rPr>
+                <a:solidFill>
+                  <a:srgbClr val="5E5E5E"/>
+                </a:solidFill>
+                <a:latin typeface="Courier"/>
+              </a:rPr>
+              <a:t>-</a:t>
+            </a:r>
+            <a:r>
+              <a:rPr>
+                <a:solidFill>
+                  <a:srgbClr val="003B4F"/>
+                </a:solidFill>
+                <a:latin typeface="Courier"/>
+              </a:rPr>
+              <a:t> </a:t>
             </a:r>
             <a:r>
               <a:rPr>
@@ -7622,7 +7641,7 @@
                 </a:solidFill>
                 <a:latin typeface="Courier"/>
               </a:rPr>
-              <a:t>-1</a:t>
+              <a:t>1</a:t>
             </a:r>
             <a:r>
               <a:rPr>
@@ -7650,7 +7669,7 @@
                 </a:solidFill>
                 <a:latin typeface="Courier"/>
               </a:rPr>
-              <a:t>                       </a:t>
+              <a:t>                        </a:t>
             </a:r>
             <a:r>
               <a:rPr>
@@ -7668,7 +7687,7 @@
                 </a:solidFill>
                 <a:latin typeface="Courier"/>
               </a:rPr>
-              <a:t>(ps_sunny_df</a:t>
+              <a:t>(sunny_df</a:t>
             </a:r>
             <a:r>
               <a:rPr>
@@ -7686,7 +7705,7 @@
                 </a:solidFill>
                 <a:latin typeface="Courier"/>
               </a:rPr>
-              <a:t>length_mm) </a:t>
+              <a:t>needle_length_mm) </a:t>
             </a:r>
             <a:r>
               <a:rPr>
@@ -7704,7 +7723,25 @@
                 </a:solidFill>
                 <a:latin typeface="Courier"/>
               </a:rPr>
-              <a:t> (pine_n2</a:t>
+              <a:t> (pine_n </a:t>
+            </a:r>
+            <a:r>
+              <a:rPr>
+                <a:solidFill>
+                  <a:srgbClr val="5E5E5E"/>
+                </a:solidFill>
+                <a:latin typeface="Courier"/>
+              </a:rPr>
+              <a:t>-</a:t>
+            </a:r>
+            <a:r>
+              <a:rPr>
+                <a:solidFill>
+                  <a:srgbClr val="003B4F"/>
+                </a:solidFill>
+                <a:latin typeface="Courier"/>
+              </a:rPr>
+              <a:t> </a:t>
             </a:r>
             <a:r>
               <a:rPr>
@@ -7713,7 +7750,7 @@
                 </a:solidFill>
                 <a:latin typeface="Courier"/>
               </a:rPr>
-              <a:t>-1</a:t>
+              <a:t>1</a:t>
             </a:r>
             <a:r>
               <a:rPr>
@@ -7741,7 +7778,25 @@
                 </a:solidFill>
                 <a:latin typeface="Courier"/>
               </a:rPr>
-              <a:t>                       (pine_n1 </a:t>
+              <a:t>                       (</a:t>
+            </a:r>
+            <a:r>
+              <a:rPr>
+                <a:solidFill>
+                  <a:srgbClr val="AD0000"/>
+                </a:solidFill>
+                <a:latin typeface="Courier"/>
+              </a:rPr>
+              <a:t>2</a:t>
+            </a:r>
+            <a:r>
+              <a:rPr>
+                <a:solidFill>
+                  <a:srgbClr val="003B4F"/>
+                </a:solidFill>
+                <a:latin typeface="Courier"/>
+              </a:rPr>
+              <a:t> </a:t>
             </a:r>
             <a:r>
               <a:rPr>
@@ -7750,16 +7805,16 @@
                 </a:solidFill>
                 <a:latin typeface="Courier"/>
               </a:rPr>
-              <a:t>+</a:t>
-            </a:r>
-            <a:r>
-              <a:rPr>
-                <a:solidFill>
-                  <a:srgbClr val="003B4F"/>
-                </a:solidFill>
-                <a:latin typeface="Courier"/>
-              </a:rPr>
-              <a:t> pine_n2 </a:t>
+              <a:t>*</a:t>
+            </a:r>
+            <a:r>
+              <a:rPr>
+                <a:solidFill>
+                  <a:srgbClr val="003B4F"/>
+                </a:solidFill>
+                <a:latin typeface="Courier"/>
+              </a:rPr>
+              <a:t> pine_n </a:t>
             </a:r>
             <a:r>
               <a:rPr>
@@ -7802,10 +7857,130 @@
             <a:r>
               <a:rPr>
                 <a:solidFill>
+                  <a:srgbClr val="003B4F"/>
+                </a:solidFill>
+                <a:latin typeface="Courier"/>
+              </a:rPr>
+              <a:t>observed_diff &lt;- </a:t>
+            </a:r>
+            <a:r>
+              <a:rPr>
+                <a:solidFill>
                   <a:srgbClr val="4758AB"/>
                 </a:solidFill>
                 <a:latin typeface="Courier"/>
               </a:rPr>
+              <a:t>abs</a:t>
+            </a:r>
+            <a:r>
+              <a:rPr>
+                <a:solidFill>
+                  <a:srgbClr val="003B4F"/>
+                </a:solidFill>
+                <a:latin typeface="Courier"/>
+              </a:rPr>
+              <a:t>(</a:t>
+            </a:r>
+            <a:r>
+              <a:rPr>
+                <a:solidFill>
+                  <a:srgbClr val="4758AB"/>
+                </a:solidFill>
+                <a:latin typeface="Courier"/>
+              </a:rPr>
+              <a:t>mean</a:t>
+            </a:r>
+            <a:r>
+              <a:rPr>
+                <a:solidFill>
+                  <a:srgbClr val="003B4F"/>
+                </a:solidFill>
+                <a:latin typeface="Courier"/>
+              </a:rPr>
+              <a:t>(shady_df</a:t>
+            </a:r>
+            <a:r>
+              <a:rPr>
+                <a:solidFill>
+                  <a:srgbClr val="5E5E5E"/>
+                </a:solidFill>
+                <a:latin typeface="Courier"/>
+              </a:rPr>
+              <a:t>$</a:t>
+            </a:r>
+            <a:r>
+              <a:rPr>
+                <a:solidFill>
+                  <a:srgbClr val="003B4F"/>
+                </a:solidFill>
+                <a:latin typeface="Courier"/>
+              </a:rPr>
+              <a:t>needle_length_mm) </a:t>
+            </a:r>
+            <a:r>
+              <a:rPr>
+                <a:solidFill>
+                  <a:srgbClr val="5E5E5E"/>
+                </a:solidFill>
+                <a:latin typeface="Courier"/>
+              </a:rPr>
+              <a:t>-</a:t>
+            </a:r>
+            <a:br/>
+            <a:r>
+              <a:rPr>
+                <a:solidFill>
+                  <a:srgbClr val="003B4F"/>
+                </a:solidFill>
+                <a:latin typeface="Courier"/>
+              </a:rPr>
+              <a:t>                     </a:t>
+            </a:r>
+            <a:r>
+              <a:rPr>
+                <a:solidFill>
+                  <a:srgbClr val="4758AB"/>
+                </a:solidFill>
+                <a:latin typeface="Courier"/>
+              </a:rPr>
+              <a:t>mean</a:t>
+            </a:r>
+            <a:r>
+              <a:rPr>
+                <a:solidFill>
+                  <a:srgbClr val="003B4F"/>
+                </a:solidFill>
+                <a:latin typeface="Courier"/>
+              </a:rPr>
+              <a:t>(sunny_df</a:t>
+            </a:r>
+            <a:r>
+              <a:rPr>
+                <a:solidFill>
+                  <a:srgbClr val="5E5E5E"/>
+                </a:solidFill>
+                <a:latin typeface="Courier"/>
+              </a:rPr>
+              <a:t>$</a:t>
+            </a:r>
+            <a:r>
+              <a:rPr>
+                <a:solidFill>
+                  <a:srgbClr val="003B4F"/>
+                </a:solidFill>
+                <a:latin typeface="Courier"/>
+              </a:rPr>
+              <a:t>needle_length_mm))</a:t>
+            </a:r>
+            <a:br/>
+            <a:br/>
+            <a:r>
+              <a:rPr>
+                <a:solidFill>
+                  <a:srgbClr val="4758AB"/>
+                </a:solidFill>
+                <a:latin typeface="Courier"/>
+              </a:rPr>
               <a:t>cat</a:t>
             </a:r>
             <a:r>
@@ -7824,6 +7999,218 @@
                 </a:solidFill>
                 <a:latin typeface="Courier"/>
               </a:rPr>
+              <a:t>"Trees per side:"</a:t>
+            </a:r>
+            <a:r>
+              <a:rPr>
+                <a:solidFill>
+                  <a:srgbClr val="003B4F"/>
+                </a:solidFill>
+                <a:latin typeface="Courier"/>
+              </a:rPr>
+              <a:t>, pine_n, </a:t>
+            </a:r>
+            <a:r>
+              <a:rPr>
+                <a:solidFill>
+                  <a:srgbClr val="20794D"/>
+                </a:solidFill>
+                <a:latin typeface="Courier"/>
+              </a:rPr>
+              <a:t>"</a:t>
+            </a:r>
+            <a:r>
+              <a:rPr>
+                <a:solidFill>
+                  <a:srgbClr val="5E5E5E"/>
+                </a:solidFill>
+                <a:latin typeface="Courier"/>
+              </a:rPr>
+              <a:t>\n</a:t>
+            </a:r>
+            <a:r>
+              <a:rPr>
+                <a:solidFill>
+                  <a:srgbClr val="20794D"/>
+                </a:solidFill>
+                <a:latin typeface="Courier"/>
+              </a:rPr>
+              <a:t>"</a:t>
+            </a:r>
+            <a:r>
+              <a:rPr>
+                <a:solidFill>
+                  <a:srgbClr val="003B4F"/>
+                </a:solidFill>
+                <a:latin typeface="Courier"/>
+              </a:rPr>
+              <a:t>)</a:t>
+            </a:r>
+          </a:p>
+          <a:p>
+            <a:pPr lvl="0" indent="0">
+              <a:buNone/>
+            </a:pPr>
+            <a:r>
+              <a:rPr>
+                <a:latin typeface="Courier"/>
+              </a:rPr>
+              <a:t>Trees per side: 4 </a:t>
+            </a:r>
+          </a:p>
+          <a:p>
+            <a:pPr lvl="0" indent="0">
+              <a:buNone/>
+            </a:pPr>
+            <a:r>
+              <a:rPr>
+                <a:solidFill>
+                  <a:srgbClr val="4758AB"/>
+                </a:solidFill>
+                <a:latin typeface="Courier"/>
+              </a:rPr>
+              <a:t>cat</a:t>
+            </a:r>
+            <a:r>
+              <a:rPr>
+                <a:solidFill>
+                  <a:srgbClr val="003B4F"/>
+                </a:solidFill>
+                <a:latin typeface="Courier"/>
+              </a:rPr>
+              <a:t>(</a:t>
+            </a:r>
+            <a:r>
+              <a:rPr>
+                <a:solidFill>
+                  <a:srgbClr val="20794D"/>
+                </a:solidFill>
+                <a:latin typeface="Courier"/>
+              </a:rPr>
+              <a:t>"Observed difference:"</a:t>
+            </a:r>
+            <a:r>
+              <a:rPr>
+                <a:solidFill>
+                  <a:srgbClr val="003B4F"/>
+                </a:solidFill>
+                <a:latin typeface="Courier"/>
+              </a:rPr>
+              <a:t>, </a:t>
+            </a:r>
+            <a:r>
+              <a:rPr>
+                <a:solidFill>
+                  <a:srgbClr val="4758AB"/>
+                </a:solidFill>
+                <a:latin typeface="Courier"/>
+              </a:rPr>
+              <a:t>round</a:t>
+            </a:r>
+            <a:r>
+              <a:rPr>
+                <a:solidFill>
+                  <a:srgbClr val="003B4F"/>
+                </a:solidFill>
+                <a:latin typeface="Courier"/>
+              </a:rPr>
+              <a:t>(observed_diff, </a:t>
+            </a:r>
+            <a:r>
+              <a:rPr>
+                <a:solidFill>
+                  <a:srgbClr val="AD0000"/>
+                </a:solidFill>
+                <a:latin typeface="Courier"/>
+              </a:rPr>
+              <a:t>2</a:t>
+            </a:r>
+            <a:r>
+              <a:rPr>
+                <a:solidFill>
+                  <a:srgbClr val="003B4F"/>
+                </a:solidFill>
+                <a:latin typeface="Courier"/>
+              </a:rPr>
+              <a:t>), </a:t>
+            </a:r>
+            <a:r>
+              <a:rPr>
+                <a:solidFill>
+                  <a:srgbClr val="20794D"/>
+                </a:solidFill>
+                <a:latin typeface="Courier"/>
+              </a:rPr>
+              <a:t>"mm</a:t>
+            </a:r>
+            <a:r>
+              <a:rPr>
+                <a:solidFill>
+                  <a:srgbClr val="5E5E5E"/>
+                </a:solidFill>
+                <a:latin typeface="Courier"/>
+              </a:rPr>
+              <a:t>\n</a:t>
+            </a:r>
+            <a:r>
+              <a:rPr>
+                <a:solidFill>
+                  <a:srgbClr val="20794D"/>
+                </a:solidFill>
+                <a:latin typeface="Courier"/>
+              </a:rPr>
+              <a:t>"</a:t>
+            </a:r>
+            <a:r>
+              <a:rPr>
+                <a:solidFill>
+                  <a:srgbClr val="003B4F"/>
+                </a:solidFill>
+                <a:latin typeface="Courier"/>
+              </a:rPr>
+              <a:t>)</a:t>
+            </a:r>
+          </a:p>
+          <a:p>
+            <a:pPr lvl="0" indent="0">
+              <a:buNone/>
+            </a:pPr>
+            <a:r>
+              <a:rPr>
+                <a:latin typeface="Courier"/>
+              </a:rPr>
+              <a:t>Observed difference: 1.09 mm</a:t>
+            </a:r>
+          </a:p>
+          <a:p>
+            <a:pPr lvl="0" indent="0">
+              <a:buNone/>
+            </a:pPr>
+            <a:r>
+              <a:rPr>
+                <a:solidFill>
+                  <a:srgbClr val="4758AB"/>
+                </a:solidFill>
+                <a:latin typeface="Courier"/>
+              </a:rPr>
+              <a:t>cat</a:t>
+            </a:r>
+            <a:r>
+              <a:rPr>
+                <a:solidFill>
+                  <a:srgbClr val="003B4F"/>
+                </a:solidFill>
+                <a:latin typeface="Courier"/>
+              </a:rPr>
+              <a:t>(</a:t>
+            </a:r>
+            <a:r>
+              <a:rPr>
+                <a:solidFill>
+                  <a:srgbClr val="20794D"/>
+                </a:solidFill>
+                <a:latin typeface="Courier"/>
+              </a:rPr>
               <a:t>"Pooled SD:"</a:t>
             </a:r>
             <a:r>
@@ -7887,7 +8274,7 @@
                 </a:solidFill>
                 <a:latin typeface="Courier"/>
               </a:rPr>
-              <a:t>\n\n</a:t>
+              <a:t>\n</a:t>
             </a:r>
             <a:r>
               <a:rPr>
@@ -7916,34 +8303,18 @@
               <a:rPr>
                 <a:latin typeface="Courier"/>
               </a:rPr>
-              <a:t>Pooled SD: 2.58 mm</a:t>
-            </a:r>
-          </a:p>
-          <a:p>
-            <a:pPr lvl="0" indent="0" marL="1270000">
-              <a:buNone/>
-            </a:pPr>
-            <a:r>
-              <a:rPr sz="2000" b="1"/>
-              <a:t>Note</a:t>
-            </a:r>
-          </a:p>
-          <a:p>
-            <a:pPr lvl="0" indent="0" marL="1270000">
-              <a:buNone/>
-            </a:pPr>
-            <a:r>
-              <a:rPr sz="2000" b="1"/>
-              <a:t>📖 Reference</a:t>
-            </a:r>
-          </a:p>
-          <a:p>
-            <a:pPr lvl="0" indent="0" marL="1270000">
-              <a:buNone/>
-            </a:pPr>
-            <a:r>
-              <a:rPr sz="2000"/>
-              <a:t>Whitlock &amp; Schluter, Ch. 14 — Designing Experiments, includes planning the sample size needed for a study.</a:t>
+              <a:t>Pooled SD: 1.81 mm</a:t>
+            </a:r>
+          </a:p>
+          <a:p>
+            <a:pPr lvl="0" indent="0" marL="0">
+              <a:buNone/>
+            </a:pPr>
+            <a:r>
+              <a:rPr>
+                <a:hlinkClick r:id="rId2"/>
+              </a:rPr>
+              <a:t>📥 Download the data</a:t>
             </a:r>
           </a:p>
         </p:txBody>
@@ -7969,30 +8340,39 @@
             <a:r>
               <a:rPr>
                 <a:solidFill>
+                  <a:srgbClr val="003B4F"/>
+                </a:solidFill>
+                <a:latin typeface="Courier"/>
+              </a:rPr>
+              <a:t>cohens_d &lt;- observed_diff </a:t>
+            </a:r>
+            <a:r>
+              <a:rPr>
+                <a:solidFill>
                   <a:srgbClr val="5E5E5E"/>
                 </a:solidFill>
                 <a:latin typeface="Courier"/>
               </a:rPr>
-              <a:t># More realistic effect sizes to test:</a:t>
+              <a:t>/</a:t>
+            </a:r>
+            <a:r>
+              <a:rPr>
+                <a:solidFill>
+                  <a:srgbClr val="003B4F"/>
+                </a:solidFill>
+                <a:latin typeface="Courier"/>
+              </a:rPr>
+              <a:t> pine_sd_pooled</a:t>
             </a:r>
             <a:br/>
             <a:r>
               <a:rPr>
                 <a:solidFill>
-                  <a:srgbClr val="003B4F"/>
-                </a:solidFill>
-                <a:latin typeface="Courier"/>
-              </a:rPr>
-              <a:t>observed_diff &lt;- </a:t>
-            </a:r>
-            <a:r>
-              <a:rPr>
-                <a:solidFill>
                   <a:srgbClr val="4758AB"/>
                 </a:solidFill>
                 <a:latin typeface="Courier"/>
               </a:rPr>
-              <a:t>abs</a:t>
+              <a:t>cat</a:t>
             </a:r>
             <a:r>
               <a:rPr>
@@ -8006,20 +8386,65 @@
             <a:r>
               <a:rPr>
                 <a:solidFill>
+                  <a:srgbClr val="20794D"/>
+                </a:solidFill>
+                <a:latin typeface="Courier"/>
+              </a:rPr>
+              <a:t>"Cohen's d ="</a:t>
+            </a:r>
+            <a:r>
+              <a:rPr>
+                <a:solidFill>
+                  <a:srgbClr val="003B4F"/>
+                </a:solidFill>
+                <a:latin typeface="Courier"/>
+              </a:rPr>
+              <a:t>, </a:t>
+            </a:r>
+            <a:r>
+              <a:rPr>
+                <a:solidFill>
                   <a:srgbClr val="4758AB"/>
                 </a:solidFill>
                 <a:latin typeface="Courier"/>
               </a:rPr>
-              <a:t>mean</a:t>
-            </a:r>
-            <a:r>
-              <a:rPr>
-                <a:solidFill>
-                  <a:srgbClr val="003B4F"/>
-                </a:solidFill>
-                <a:latin typeface="Courier"/>
-              </a:rPr>
-              <a:t>(ps_shady_df</a:t>
+              <a:t>round</a:t>
+            </a:r>
+            <a:r>
+              <a:rPr>
+                <a:solidFill>
+                  <a:srgbClr val="003B4F"/>
+                </a:solidFill>
+                <a:latin typeface="Courier"/>
+              </a:rPr>
+              <a:t>(cohens_d, </a:t>
+            </a:r>
+            <a:r>
+              <a:rPr>
+                <a:solidFill>
+                  <a:srgbClr val="AD0000"/>
+                </a:solidFill>
+                <a:latin typeface="Courier"/>
+              </a:rPr>
+              <a:t>2</a:t>
+            </a:r>
+            <a:r>
+              <a:rPr>
+                <a:solidFill>
+                  <a:srgbClr val="003B4F"/>
+                </a:solidFill>
+                <a:latin typeface="Courier"/>
+              </a:rPr>
+              <a:t>), </a:t>
+            </a:r>
+            <a:r>
+              <a:rPr>
+                <a:solidFill>
+                  <a:srgbClr val="20794D"/>
+                </a:solidFill>
+                <a:latin typeface="Courier"/>
+              </a:rPr>
+              <a:t>"</a:t>
             </a:r>
             <a:r>
               <a:rPr>
@@ -8028,25 +8453,133 @@
                 </a:solidFill>
                 <a:latin typeface="Courier"/>
               </a:rPr>
-              <a:t>$</a:t>
-            </a:r>
-            <a:r>
-              <a:rPr>
-                <a:solidFill>
-                  <a:srgbClr val="003B4F"/>
-                </a:solidFill>
-                <a:latin typeface="Courier"/>
-              </a:rPr>
-              <a:t>length_mm) </a:t>
-            </a:r>
-            <a:r>
-              <a:rPr>
-                <a:solidFill>
-                  <a:srgbClr val="5E5E5E"/>
-                </a:solidFill>
-                <a:latin typeface="Courier"/>
-              </a:rPr>
-              <a:t>-</a:t>
+              <a:t>\n\n</a:t>
+            </a:r>
+            <a:r>
+              <a:rPr>
+                <a:solidFill>
+                  <a:srgbClr val="20794D"/>
+                </a:solidFill>
+                <a:latin typeface="Courier"/>
+              </a:rPr>
+              <a:t>"</a:t>
+            </a:r>
+            <a:r>
+              <a:rPr>
+                <a:solidFill>
+                  <a:srgbClr val="003B4F"/>
+                </a:solidFill>
+                <a:latin typeface="Courier"/>
+              </a:rPr>
+              <a:t>)</a:t>
+            </a:r>
+          </a:p>
+          <a:p>
+            <a:pPr lvl="0" indent="0">
+              <a:buNone/>
+            </a:pPr>
+            <a:r>
+              <a:rPr>
+                <a:latin typeface="Courier"/>
+              </a:rPr>
+              <a:t>Cohen's d = 0.6 </a:t>
+            </a:r>
+          </a:p>
+          <a:p>
+            <a:pPr lvl="0" indent="0">
+              <a:buNone/>
+            </a:pPr>
+            <a:r>
+              <a:rPr>
+                <a:solidFill>
+                  <a:srgbClr val="003B4F"/>
+                </a:solidFill>
+                <a:latin typeface="Courier"/>
+              </a:rPr>
+              <a:t>pine_power &lt;- </a:t>
+            </a:r>
+            <a:r>
+              <a:rPr>
+                <a:solidFill>
+                  <a:srgbClr val="4758AB"/>
+                </a:solidFill>
+                <a:latin typeface="Courier"/>
+              </a:rPr>
+              <a:t>power.t.test</a:t>
+            </a:r>
+            <a:r>
+              <a:rPr>
+                <a:solidFill>
+                  <a:srgbClr val="003B4F"/>
+                </a:solidFill>
+                <a:latin typeface="Courier"/>
+              </a:rPr>
+              <a:t>(</a:t>
+            </a:r>
+            <a:r>
+              <a:rPr>
+                <a:solidFill>
+                  <a:srgbClr val="657422"/>
+                </a:solidFill>
+                <a:latin typeface="Courier"/>
+              </a:rPr>
+              <a:t>n =</a:t>
+            </a:r>
+            <a:r>
+              <a:rPr>
+                <a:solidFill>
+                  <a:srgbClr val="003B4F"/>
+                </a:solidFill>
+                <a:latin typeface="Courier"/>
+              </a:rPr>
+              <a:t> pine_n,</a:t>
+            </a:r>
+            <a:br/>
+            <a:r>
+              <a:rPr>
+                <a:solidFill>
+                  <a:srgbClr val="003B4F"/>
+                </a:solidFill>
+                <a:latin typeface="Courier"/>
+              </a:rPr>
+              <a:t>                           </a:t>
+            </a:r>
+            <a:r>
+              <a:rPr>
+                <a:solidFill>
+                  <a:srgbClr val="657422"/>
+                </a:solidFill>
+                <a:latin typeface="Courier"/>
+              </a:rPr>
+              <a:t>delta =</a:t>
+            </a:r>
+            <a:r>
+              <a:rPr>
+                <a:solidFill>
+                  <a:srgbClr val="003B4F"/>
+                </a:solidFill>
+                <a:latin typeface="Courier"/>
+              </a:rPr>
+              <a:t> cohens_d,</a:t>
+            </a:r>
+            <a:br/>
+            <a:r>
+              <a:rPr>
+                <a:solidFill>
+                  <a:srgbClr val="003B4F"/>
+                </a:solidFill>
+                <a:latin typeface="Courier"/>
+              </a:rPr>
+              <a:t>                           </a:t>
+            </a:r>
+            <a:r>
+              <a:rPr>
+                <a:solidFill>
+                  <a:srgbClr val="657422"/>
+                </a:solidFill>
+                <a:latin typeface="Courier"/>
+              </a:rPr>
+              <a:t>sd =</a:t>
             </a:r>
             <a:r>
               <a:rPr>
@@ -8060,38 +8593,20 @@
             <a:r>
               <a:rPr>
                 <a:solidFill>
-                  <a:srgbClr val="4758AB"/>
-                </a:solidFill>
-                <a:latin typeface="Courier"/>
-              </a:rPr>
-              <a:t>mean</a:t>
-            </a:r>
-            <a:r>
-              <a:rPr>
-                <a:solidFill>
-                  <a:srgbClr val="003B4F"/>
-                </a:solidFill>
-                <a:latin typeface="Courier"/>
-              </a:rPr>
-              <a:t>(ps_sunny_df</a:t>
-            </a:r>
-            <a:r>
-              <a:rPr>
-                <a:solidFill>
-                  <a:srgbClr val="5E5E5E"/>
-                </a:solidFill>
-                <a:latin typeface="Courier"/>
-              </a:rPr>
-              <a:t>$</a:t>
-            </a:r>
-            <a:r>
-              <a:rPr>
-                <a:solidFill>
-                  <a:srgbClr val="003B4F"/>
-                </a:solidFill>
-                <a:latin typeface="Courier"/>
-              </a:rPr>
-              <a:t>length_mm))</a:t>
+                  <a:srgbClr val="AD0000"/>
+                </a:solidFill>
+                <a:latin typeface="Courier"/>
+              </a:rPr>
+              <a:t>1</a:t>
+            </a:r>
+            <a:r>
+              <a:rPr>
+                <a:solidFill>
+                  <a:srgbClr val="003B4F"/>
+                </a:solidFill>
+                <a:latin typeface="Courier"/>
+              </a:rPr>
+              <a:t>,</a:t>
             </a:r>
             <a:br/>
             <a:r>
@@ -8101,44 +8616,71 @@
                 </a:solidFill>
                 <a:latin typeface="Courier"/>
               </a:rPr>
-              <a:t>pine_effect_size_observed &lt;- observed_diff </a:t>
-            </a:r>
-            <a:r>
-              <a:rPr>
-                <a:solidFill>
-                  <a:srgbClr val="5E5E5E"/>
-                </a:solidFill>
-                <a:latin typeface="Courier"/>
-              </a:rPr>
-              <a:t>/</a:t>
-            </a:r>
-            <a:r>
-              <a:rPr>
-                <a:solidFill>
-                  <a:srgbClr val="003B4F"/>
-                </a:solidFill>
-                <a:latin typeface="Courier"/>
-              </a:rPr>
-              <a:t> pine_sd_pooled</a:t>
+              <a:t>                           </a:t>
+            </a:r>
+            <a:r>
+              <a:rPr>
+                <a:solidFill>
+                  <a:srgbClr val="657422"/>
+                </a:solidFill>
+                <a:latin typeface="Courier"/>
+              </a:rPr>
+              <a:t>sig.level =</a:t>
+            </a:r>
+            <a:r>
+              <a:rPr>
+                <a:solidFill>
+                  <a:srgbClr val="003B4F"/>
+                </a:solidFill>
+                <a:latin typeface="Courier"/>
+              </a:rPr>
+              <a:t> </a:t>
+            </a:r>
+            <a:r>
+              <a:rPr>
+                <a:solidFill>
+                  <a:srgbClr val="AD0000"/>
+                </a:solidFill>
+                <a:latin typeface="Courier"/>
+              </a:rPr>
+              <a:t>0.05</a:t>
+            </a:r>
+            <a:r>
+              <a:rPr>
+                <a:solidFill>
+                  <a:srgbClr val="003B4F"/>
+                </a:solidFill>
+                <a:latin typeface="Courier"/>
+              </a:rPr>
+              <a:t>,</a:t>
             </a:r>
             <a:br/>
             <a:r>
               <a:rPr>
                 <a:solidFill>
-                  <a:srgbClr val="4758AB"/>
-                </a:solidFill>
-                <a:latin typeface="Courier"/>
-              </a:rPr>
-              <a:t>cat</a:t>
-            </a:r>
-            <a:r>
-              <a:rPr>
-                <a:solidFill>
-                  <a:srgbClr val="003B4F"/>
-                </a:solidFill>
-                <a:latin typeface="Courier"/>
-              </a:rPr>
-              <a:t>(</a:t>
+                  <a:srgbClr val="003B4F"/>
+                </a:solidFill>
+                <a:latin typeface="Courier"/>
+              </a:rPr>
+              <a:t>                           </a:t>
+            </a:r>
+            <a:r>
+              <a:rPr>
+                <a:solidFill>
+                  <a:srgbClr val="657422"/>
+                </a:solidFill>
+                <a:latin typeface="Courier"/>
+              </a:rPr>
+              <a:t>type =</a:t>
+            </a:r>
+            <a:r>
+              <a:rPr>
+                <a:solidFill>
+                  <a:srgbClr val="003B4F"/>
+                </a:solidFill>
+                <a:latin typeface="Courier"/>
+              </a:rPr>
+              <a:t> </a:t>
             </a:r>
             <a:r>
               <a:rPr>
@@ -8147,221 +8689,16 @@
                 </a:solidFill>
                 <a:latin typeface="Courier"/>
               </a:rPr>
-              <a:t>"Effect size for observed"</a:t>
-            </a:r>
-            <a:r>
-              <a:rPr>
-                <a:solidFill>
-                  <a:srgbClr val="003B4F"/>
-                </a:solidFill>
-                <a:latin typeface="Courier"/>
-              </a:rPr>
-              <a:t>, </a:t>
-            </a:r>
-            <a:r>
-              <a:rPr>
-                <a:solidFill>
-                  <a:srgbClr val="4758AB"/>
-                </a:solidFill>
-                <a:latin typeface="Courier"/>
-              </a:rPr>
-              <a:t>round</a:t>
-            </a:r>
-            <a:r>
-              <a:rPr>
-                <a:solidFill>
-                  <a:srgbClr val="003B4F"/>
-                </a:solidFill>
-                <a:latin typeface="Courier"/>
-              </a:rPr>
-              <a:t>(observed_diff, </a:t>
-            </a:r>
-            <a:r>
-              <a:rPr>
-                <a:solidFill>
-                  <a:srgbClr val="AD0000"/>
-                </a:solidFill>
-                <a:latin typeface="Courier"/>
-              </a:rPr>
-              <a:t>2</a:t>
-            </a:r>
-            <a:r>
-              <a:rPr>
-                <a:solidFill>
-                  <a:srgbClr val="003B4F"/>
-                </a:solidFill>
-                <a:latin typeface="Courier"/>
-              </a:rPr>
-              <a:t>), </a:t>
-            </a:r>
-            <a:r>
-              <a:rPr>
-                <a:solidFill>
-                  <a:srgbClr val="20794D"/>
-                </a:solidFill>
-                <a:latin typeface="Courier"/>
-              </a:rPr>
-              <a:t>"mm difference: Cohen's d ="</a:t>
-            </a:r>
-            <a:r>
-              <a:rPr>
-                <a:solidFill>
-                  <a:srgbClr val="003B4F"/>
-                </a:solidFill>
-                <a:latin typeface="Courier"/>
-              </a:rPr>
-              <a:t>, </a:t>
-            </a:r>
-            <a:r>
-              <a:rPr>
-                <a:solidFill>
-                  <a:srgbClr val="4758AB"/>
-                </a:solidFill>
-                <a:latin typeface="Courier"/>
-              </a:rPr>
-              <a:t>round</a:t>
-            </a:r>
-            <a:r>
-              <a:rPr>
-                <a:solidFill>
-                  <a:srgbClr val="003B4F"/>
-                </a:solidFill>
-                <a:latin typeface="Courier"/>
-              </a:rPr>
-              <a:t>(pine_effect_size_observed, </a:t>
-            </a:r>
-            <a:r>
-              <a:rPr>
-                <a:solidFill>
-                  <a:srgbClr val="AD0000"/>
-                </a:solidFill>
-                <a:latin typeface="Courier"/>
-              </a:rPr>
-              <a:t>2</a:t>
-            </a:r>
-            <a:r>
-              <a:rPr>
-                <a:solidFill>
-                  <a:srgbClr val="003B4F"/>
-                </a:solidFill>
-                <a:latin typeface="Courier"/>
-              </a:rPr>
-              <a:t>), </a:t>
-            </a:r>
-            <a:r>
-              <a:rPr>
-                <a:solidFill>
-                  <a:srgbClr val="20794D"/>
-                </a:solidFill>
-                <a:latin typeface="Courier"/>
-              </a:rPr>
-              <a:t>"</a:t>
-            </a:r>
-            <a:r>
-              <a:rPr>
-                <a:solidFill>
-                  <a:srgbClr val="5E5E5E"/>
-                </a:solidFill>
-                <a:latin typeface="Courier"/>
-              </a:rPr>
-              <a:t>\n</a:t>
-            </a:r>
-            <a:r>
-              <a:rPr>
-                <a:solidFill>
-                  <a:srgbClr val="20794D"/>
-                </a:solidFill>
-                <a:latin typeface="Courier"/>
-              </a:rPr>
-              <a:t>"</a:t>
-            </a:r>
-            <a:r>
-              <a:rPr>
-                <a:solidFill>
-                  <a:srgbClr val="003B4F"/>
-                </a:solidFill>
-                <a:latin typeface="Courier"/>
-              </a:rPr>
-              <a:t>)</a:t>
-            </a:r>
-          </a:p>
-          <a:p>
-            <a:pPr lvl="0" indent="0">
-              <a:buNone/>
-            </a:pPr>
-            <a:r>
-              <a:rPr>
-                <a:latin typeface="Courier"/>
-              </a:rPr>
-              <a:t>Effect size for observed 1.45 mm difference: Cohen's d = 0.56 </a:t>
-            </a:r>
-          </a:p>
-          <a:p>
-            <a:pPr lvl="0" indent="0">
-              <a:buNone/>
-            </a:pPr>
-            <a:r>
-              <a:rPr>
-                <a:solidFill>
-                  <a:srgbClr val="003B4F"/>
-                </a:solidFill>
-                <a:latin typeface="Courier"/>
-              </a:rPr>
-              <a:t>pine_power_observed &lt;- </a:t>
-            </a:r>
-            <a:r>
-              <a:rPr>
-                <a:solidFill>
-                  <a:srgbClr val="4758AB"/>
-                </a:solidFill>
-                <a:latin typeface="Courier"/>
-              </a:rPr>
-              <a:t>power.t.test</a:t>
-            </a:r>
-            <a:r>
-              <a:rPr>
-                <a:solidFill>
-                  <a:srgbClr val="003B4F"/>
-                </a:solidFill>
-                <a:latin typeface="Courier"/>
-              </a:rPr>
-              <a:t>(</a:t>
-            </a:r>
-            <a:r>
-              <a:rPr>
-                <a:solidFill>
-                  <a:srgbClr val="657422"/>
-                </a:solidFill>
-                <a:latin typeface="Courier"/>
-              </a:rPr>
-              <a:t>n =</a:t>
-            </a:r>
-            <a:r>
-              <a:rPr>
-                <a:solidFill>
-                  <a:srgbClr val="003B4F"/>
-                </a:solidFill>
-                <a:latin typeface="Courier"/>
-              </a:rPr>
-              <a:t> </a:t>
-            </a:r>
-            <a:r>
-              <a:rPr>
-                <a:solidFill>
-                  <a:srgbClr val="4758AB"/>
-                </a:solidFill>
-                <a:latin typeface="Courier"/>
-              </a:rPr>
-              <a:t>min</a:t>
-            </a:r>
-            <a:r>
-              <a:rPr>
-                <a:solidFill>
-                  <a:srgbClr val="003B4F"/>
-                </a:solidFill>
-                <a:latin typeface="Courier"/>
-              </a:rPr>
-              <a:t>(pine_n1, pine_n2),</a:t>
+              <a:t>"two.sample"</a:t>
+            </a:r>
+            <a:r>
+              <a:rPr>
+                <a:solidFill>
+                  <a:srgbClr val="003B4F"/>
+                </a:solidFill>
+                <a:latin typeface="Courier"/>
+              </a:rPr>
+              <a:t>,</a:t>
             </a:r>
             <a:br/>
             <a:r>
@@ -8371,155 +8708,7 @@
                 </a:solidFill>
                 <a:latin typeface="Courier"/>
               </a:rPr>
-              <a:t>                                   </a:t>
-            </a:r>
-            <a:r>
-              <a:rPr>
-                <a:solidFill>
-                  <a:srgbClr val="657422"/>
-                </a:solidFill>
-                <a:latin typeface="Courier"/>
-              </a:rPr>
-              <a:t>delta =</a:t>
-            </a:r>
-            <a:r>
-              <a:rPr>
-                <a:solidFill>
-                  <a:srgbClr val="003B4F"/>
-                </a:solidFill>
-                <a:latin typeface="Courier"/>
-              </a:rPr>
-              <a:t> pine_effect_size_observed,</a:t>
-            </a:r>
-            <a:br/>
-            <a:r>
-              <a:rPr>
-                <a:solidFill>
-                  <a:srgbClr val="003B4F"/>
-                </a:solidFill>
-                <a:latin typeface="Courier"/>
-              </a:rPr>
-              <a:t>                                   </a:t>
-            </a:r>
-            <a:r>
-              <a:rPr>
-                <a:solidFill>
-                  <a:srgbClr val="657422"/>
-                </a:solidFill>
-                <a:latin typeface="Courier"/>
-              </a:rPr>
-              <a:t>sd =</a:t>
-            </a:r>
-            <a:r>
-              <a:rPr>
-                <a:solidFill>
-                  <a:srgbClr val="003B4F"/>
-                </a:solidFill>
-                <a:latin typeface="Courier"/>
-              </a:rPr>
-              <a:t> </a:t>
-            </a:r>
-            <a:r>
-              <a:rPr>
-                <a:solidFill>
-                  <a:srgbClr val="AD0000"/>
-                </a:solidFill>
-                <a:latin typeface="Courier"/>
-              </a:rPr>
-              <a:t>1</a:t>
-            </a:r>
-            <a:r>
-              <a:rPr>
-                <a:solidFill>
-                  <a:srgbClr val="003B4F"/>
-                </a:solidFill>
-                <a:latin typeface="Courier"/>
-              </a:rPr>
-              <a:t>,</a:t>
-            </a:r>
-            <a:br/>
-            <a:r>
-              <a:rPr>
-                <a:solidFill>
-                  <a:srgbClr val="003B4F"/>
-                </a:solidFill>
-                <a:latin typeface="Courier"/>
-              </a:rPr>
-              <a:t>                                   </a:t>
-            </a:r>
-            <a:r>
-              <a:rPr>
-                <a:solidFill>
-                  <a:srgbClr val="657422"/>
-                </a:solidFill>
-                <a:latin typeface="Courier"/>
-              </a:rPr>
-              <a:t>sig.level =</a:t>
-            </a:r>
-            <a:r>
-              <a:rPr>
-                <a:solidFill>
-                  <a:srgbClr val="003B4F"/>
-                </a:solidFill>
-                <a:latin typeface="Courier"/>
-              </a:rPr>
-              <a:t> pine_alpha,</a:t>
-            </a:r>
-            <a:br/>
-            <a:r>
-              <a:rPr>
-                <a:solidFill>
-                  <a:srgbClr val="003B4F"/>
-                </a:solidFill>
-                <a:latin typeface="Courier"/>
-              </a:rPr>
-              <a:t>                                   </a:t>
-            </a:r>
-            <a:r>
-              <a:rPr>
-                <a:solidFill>
-                  <a:srgbClr val="657422"/>
-                </a:solidFill>
-                <a:latin typeface="Courier"/>
-              </a:rPr>
-              <a:t>type =</a:t>
-            </a:r>
-            <a:r>
-              <a:rPr>
-                <a:solidFill>
-                  <a:srgbClr val="003B4F"/>
-                </a:solidFill>
-                <a:latin typeface="Courier"/>
-              </a:rPr>
-              <a:t> </a:t>
-            </a:r>
-            <a:r>
-              <a:rPr>
-                <a:solidFill>
-                  <a:srgbClr val="20794D"/>
-                </a:solidFill>
-                <a:latin typeface="Courier"/>
-              </a:rPr>
-              <a:t>"two.sample"</a:t>
-            </a:r>
-            <a:r>
-              <a:rPr>
-                <a:solidFill>
-                  <a:srgbClr val="003B4F"/>
-                </a:solidFill>
-                <a:latin typeface="Courier"/>
-              </a:rPr>
-              <a:t>,</a:t>
-            </a:r>
-            <a:br/>
-            <a:r>
-              <a:rPr>
-                <a:solidFill>
-                  <a:srgbClr val="003B4F"/>
-                </a:solidFill>
-                <a:latin typeface="Courier"/>
-              </a:rPr>
-              <a:t>                                   </a:t>
+              <a:t>                           </a:t>
             </a:r>
             <a:r>
               <a:rPr>
@@ -8584,7 +8773,7 @@
                 </a:solidFill>
                 <a:latin typeface="Courier"/>
               </a:rPr>
-              <a:t>"Power for observed"</a:t>
+              <a:t>"Power to detect it:"</a:t>
             </a:r>
             <a:r>
               <a:rPr>
@@ -8611,7 +8800,25 @@
                 </a:solidFill>
                 <a:latin typeface="Courier"/>
               </a:rPr>
-              <a:t>(observed_diff, </a:t>
+              <a:t>(pine_power</a:t>
+            </a:r>
+            <a:r>
+              <a:rPr>
+                <a:solidFill>
+                  <a:srgbClr val="5E5E5E"/>
+                </a:solidFill>
+                <a:latin typeface="Courier"/>
+              </a:rPr>
+              <a:t>$</a:t>
+            </a:r>
+            <a:r>
+              <a:rPr>
+                <a:solidFill>
+                  <a:srgbClr val="003B4F"/>
+                </a:solidFill>
+                <a:latin typeface="Courier"/>
+              </a:rPr>
+              <a:t>power, </a:t>
             </a:r>
             <a:r>
               <a:rPr>
@@ -8620,7 +8827,7 @@
                 </a:solidFill>
                 <a:latin typeface="Courier"/>
               </a:rPr>
-              <a:t>2</a:t>
+              <a:t>3</a:t>
             </a:r>
             <a:r>
               <a:rPr>
@@ -8638,34 +8845,7 @@
                 </a:solidFill>
                 <a:latin typeface="Courier"/>
               </a:rPr>
-              <a:t>"mm difference:"</a:t>
-            </a:r>
-            <a:r>
-              <a:rPr>
-                <a:solidFill>
-                  <a:srgbClr val="003B4F"/>
-                </a:solidFill>
-                <a:latin typeface="Courier"/>
-              </a:rPr>
-              <a:t>, </a:t>
-            </a:r>
-            <a:r>
-              <a:rPr>
-                <a:solidFill>
-                  <a:srgbClr val="4758AB"/>
-                </a:solidFill>
-                <a:latin typeface="Courier"/>
-              </a:rPr>
-              <a:t>round</a:t>
-            </a:r>
-            <a:r>
-              <a:rPr>
-                <a:solidFill>
-                  <a:srgbClr val="003B4F"/>
-                </a:solidFill>
-                <a:latin typeface="Courier"/>
-              </a:rPr>
-              <a:t>(pine_power_observed</a:t>
+              <a:t>"</a:t>
             </a:r>
             <a:r>
               <a:rPr>
@@ -8674,34 +8854,7 @@
                 </a:solidFill>
                 <a:latin typeface="Courier"/>
               </a:rPr>
-              <a:t>$</a:t>
-            </a:r>
-            <a:r>
-              <a:rPr>
-                <a:solidFill>
-                  <a:srgbClr val="003B4F"/>
-                </a:solidFill>
-                <a:latin typeface="Courier"/>
-              </a:rPr>
-              <a:t>power, </a:t>
-            </a:r>
-            <a:r>
-              <a:rPr>
-                <a:solidFill>
-                  <a:srgbClr val="AD0000"/>
-                </a:solidFill>
-                <a:latin typeface="Courier"/>
-              </a:rPr>
-              <a:t>3</a:t>
-            </a:r>
-            <a:r>
-              <a:rPr>
-                <a:solidFill>
-                  <a:srgbClr val="003B4F"/>
-                </a:solidFill>
-                <a:latin typeface="Courier"/>
-              </a:rPr>
-              <a:t>), </a:t>
+              <a:t>\n</a:t>
             </a:r>
             <a:r>
               <a:rPr>
@@ -8715,24 +8868,6 @@
             <a:r>
               <a:rPr>
                 <a:solidFill>
-                  <a:srgbClr val="5E5E5E"/>
-                </a:solidFill>
-                <a:latin typeface="Courier"/>
-              </a:rPr>
-              <a:t>\n</a:t>
-            </a:r>
-            <a:r>
-              <a:rPr>
-                <a:solidFill>
-                  <a:srgbClr val="20794D"/>
-                </a:solidFill>
-                <a:latin typeface="Courier"/>
-              </a:rPr>
-              <a:t>"</a:t>
-            </a:r>
-            <a:r>
-              <a:rPr>
-                <a:solidFill>
                   <a:srgbClr val="003B4F"/>
                 </a:solidFill>
                 <a:latin typeface="Courier"/>
@@ -8748,7 +8883,38 @@
               <a:rPr>
                 <a:latin typeface="Courier"/>
               </a:rPr>
-              <a:t>Power for observed 1.45 mm difference: 0.182 </a:t>
+              <a:t>Power to detect it: 0.109 </a:t>
+            </a:r>
+          </a:p>
+          <a:p>
+            <a:pPr lvl="0" indent="0" marL="1270000">
+              <a:buNone/>
+            </a:pPr>
+            <a:r>
+              <a:rPr sz="2000" b="1"/>
+              <a:t>Important</a:t>
+            </a:r>
+          </a:p>
+          <a:p>
+            <a:pPr lvl="0" indent="0" marL="1270000">
+              <a:buNone/>
+            </a:pPr>
+            <a:r>
+              <a:rPr sz="2000" b="1"/>
+              <a:t>⚠️ 11% power</a:t>
+            </a:r>
+          </a:p>
+          <a:p>
+            <a:pPr lvl="0" indent="0" marL="1270000">
+              <a:buNone/>
+            </a:pPr>
+            <a:r>
+              <a:rPr sz="2000"/>
+              <a:t>Even if this difference is completely real, an unpaired study with 4 trees per side would </a:t>
+            </a:r>
+            <a:r>
+              <a:rPr sz="2000" b="1"/>
+              <a:t>miss it about 9 times out of 10.</a:t>
             </a:r>
           </a:p>
         </p:txBody>
@@ -8803,7 +8969,7 @@
             </a:pPr>
             <a:r>
               <a:rPr/>
-              <a:t>What Is Power?</a:t>
+              <a:t>How Many Trees Would We Have Needed?</a:t>
             </a:r>
           </a:p>
         </p:txBody>
@@ -8828,7 +8994,267 @@
             </a:pPr>
             <a:r>
               <a:rPr/>
-              <a:t>Statistical power represents the probability of detecting a true effect (rejecting the null hypothesis when it is false). With a power of 97%, there’s a 97% chance of detecting a true difference of X units between the means of the two groups, if such a difference actually exists.</a:t>
+              <a:t>Turn the calculation around: instead of asking “what power do we have?”, ask </a:t>
+            </a:r>
+            <a:r>
+              <a:rPr b="1"/>
+              <a:t>“what n would we need?”</a:t>
+            </a:r>
+            <a:r>
+              <a:rPr/>
+              <a:t> This is the version you should run </a:t>
+            </a:r>
+            <a:r>
+              <a:rPr i="1"/>
+              <a:t>before</a:t>
+            </a:r>
+            <a:r>
+              <a:rPr/>
+              <a:t> collecting anything.</a:t>
+            </a:r>
+          </a:p>
+          <a:p>
+            <a:pPr lvl="0" indent="0">
+              <a:buNone/>
+            </a:pPr>
+            <a:r>
+              <a:rPr>
+                <a:solidFill>
+                  <a:srgbClr val="5E5E5E"/>
+                </a:solidFill>
+                <a:latin typeface="Courier"/>
+              </a:rPr>
+              <a:t># n per side for the conventional 80% power, unpaired</a:t>
+            </a:r>
+            <a:br/>
+            <a:r>
+              <a:rPr>
+                <a:solidFill>
+                  <a:srgbClr val="4758AB"/>
+                </a:solidFill>
+                <a:latin typeface="Courier"/>
+              </a:rPr>
+              <a:t>power.t.test</a:t>
+            </a:r>
+            <a:r>
+              <a:rPr>
+                <a:solidFill>
+                  <a:srgbClr val="003B4F"/>
+                </a:solidFill>
+                <a:latin typeface="Courier"/>
+              </a:rPr>
+              <a:t>(</a:t>
+            </a:r>
+            <a:r>
+              <a:rPr>
+                <a:solidFill>
+                  <a:srgbClr val="657422"/>
+                </a:solidFill>
+                <a:latin typeface="Courier"/>
+              </a:rPr>
+              <a:t>delta =</a:t>
+            </a:r>
+            <a:r>
+              <a:rPr>
+                <a:solidFill>
+                  <a:srgbClr val="003B4F"/>
+                </a:solidFill>
+                <a:latin typeface="Courier"/>
+              </a:rPr>
+              <a:t> cohens_d, </a:t>
+            </a:r>
+            <a:r>
+              <a:rPr>
+                <a:solidFill>
+                  <a:srgbClr val="657422"/>
+                </a:solidFill>
+                <a:latin typeface="Courier"/>
+              </a:rPr>
+              <a:t>sd =</a:t>
+            </a:r>
+            <a:r>
+              <a:rPr>
+                <a:solidFill>
+                  <a:srgbClr val="003B4F"/>
+                </a:solidFill>
+                <a:latin typeface="Courier"/>
+              </a:rPr>
+              <a:t> </a:t>
+            </a:r>
+            <a:r>
+              <a:rPr>
+                <a:solidFill>
+                  <a:srgbClr val="AD0000"/>
+                </a:solidFill>
+                <a:latin typeface="Courier"/>
+              </a:rPr>
+              <a:t>1</a:t>
+            </a:r>
+            <a:r>
+              <a:rPr>
+                <a:solidFill>
+                  <a:srgbClr val="003B4F"/>
+                </a:solidFill>
+                <a:latin typeface="Courier"/>
+              </a:rPr>
+              <a:t>,</a:t>
+            </a:r>
+            <a:br/>
+            <a:r>
+              <a:rPr>
+                <a:solidFill>
+                  <a:srgbClr val="003B4F"/>
+                </a:solidFill>
+                <a:latin typeface="Courier"/>
+              </a:rPr>
+              <a:t>             </a:t>
+            </a:r>
+            <a:r>
+              <a:rPr>
+                <a:solidFill>
+                  <a:srgbClr val="657422"/>
+                </a:solidFill>
+                <a:latin typeface="Courier"/>
+              </a:rPr>
+              <a:t>power =</a:t>
+            </a:r>
+            <a:r>
+              <a:rPr>
+                <a:solidFill>
+                  <a:srgbClr val="003B4F"/>
+                </a:solidFill>
+                <a:latin typeface="Courier"/>
+              </a:rPr>
+              <a:t> </a:t>
+            </a:r>
+            <a:r>
+              <a:rPr>
+                <a:solidFill>
+                  <a:srgbClr val="AD0000"/>
+                </a:solidFill>
+                <a:latin typeface="Courier"/>
+              </a:rPr>
+              <a:t>0.80</a:t>
+            </a:r>
+            <a:r>
+              <a:rPr>
+                <a:solidFill>
+                  <a:srgbClr val="003B4F"/>
+                </a:solidFill>
+                <a:latin typeface="Courier"/>
+              </a:rPr>
+              <a:t>, </a:t>
+            </a:r>
+            <a:r>
+              <a:rPr>
+                <a:solidFill>
+                  <a:srgbClr val="657422"/>
+                </a:solidFill>
+                <a:latin typeface="Courier"/>
+              </a:rPr>
+              <a:t>sig.level =</a:t>
+            </a:r>
+            <a:r>
+              <a:rPr>
+                <a:solidFill>
+                  <a:srgbClr val="003B4F"/>
+                </a:solidFill>
+                <a:latin typeface="Courier"/>
+              </a:rPr>
+              <a:t> </a:t>
+            </a:r>
+            <a:r>
+              <a:rPr>
+                <a:solidFill>
+                  <a:srgbClr val="AD0000"/>
+                </a:solidFill>
+                <a:latin typeface="Courier"/>
+              </a:rPr>
+              <a:t>0.05</a:t>
+            </a:r>
+            <a:r>
+              <a:rPr>
+                <a:solidFill>
+                  <a:srgbClr val="003B4F"/>
+                </a:solidFill>
+                <a:latin typeface="Courier"/>
+              </a:rPr>
+              <a:t>,</a:t>
+            </a:r>
+            <a:br/>
+            <a:r>
+              <a:rPr>
+                <a:solidFill>
+                  <a:srgbClr val="003B4F"/>
+                </a:solidFill>
+                <a:latin typeface="Courier"/>
+              </a:rPr>
+              <a:t>             </a:t>
+            </a:r>
+            <a:r>
+              <a:rPr>
+                <a:solidFill>
+                  <a:srgbClr val="657422"/>
+                </a:solidFill>
+                <a:latin typeface="Courier"/>
+              </a:rPr>
+              <a:t>type =</a:t>
+            </a:r>
+            <a:r>
+              <a:rPr>
+                <a:solidFill>
+                  <a:srgbClr val="003B4F"/>
+                </a:solidFill>
+                <a:latin typeface="Courier"/>
+              </a:rPr>
+              <a:t> </a:t>
+            </a:r>
+            <a:r>
+              <a:rPr>
+                <a:solidFill>
+                  <a:srgbClr val="20794D"/>
+                </a:solidFill>
+                <a:latin typeface="Courier"/>
+              </a:rPr>
+              <a:t>"two.sample"</a:t>
+            </a:r>
+            <a:r>
+              <a:rPr>
+                <a:solidFill>
+                  <a:srgbClr val="003B4F"/>
+                </a:solidFill>
+                <a:latin typeface="Courier"/>
+              </a:rPr>
+              <a:t>)</a:t>
+            </a:r>
+            <a:r>
+              <a:rPr>
+                <a:solidFill>
+                  <a:srgbClr val="5E5E5E"/>
+                </a:solidFill>
+                <a:latin typeface="Courier"/>
+              </a:rPr>
+              <a:t>$</a:t>
+            </a:r>
+            <a:r>
+              <a:rPr>
+                <a:solidFill>
+                  <a:srgbClr val="003B4F"/>
+                </a:solidFill>
+                <a:latin typeface="Courier"/>
+              </a:rPr>
+              <a:t>n</a:t>
+            </a:r>
+          </a:p>
+          <a:p>
+            <a:pPr lvl="0" indent="0">
+              <a:buNone/>
+            </a:pPr>
+            <a:r>
+              <a:rPr>
+                <a:latin typeface="Courier"/>
+              </a:rPr>
+              <a:t>[1] 43.89932</a:t>
             </a:r>
           </a:p>
           <a:p>
@@ -8836,35 +9262,39 @@
               <a:buNone/>
             </a:pPr>
             <a:r>
-              <a:rPr/>
-              <a:t>A power analysis like this is typically done for one of these purposes:</a:t>
-            </a:r>
-          </a:p>
-          <a:p>
-            <a:pPr lvl="0" indent="-342900" marL="342900">
-              <a:buAutoNum type="arabicPeriod"/>
-            </a:pPr>
-            <a:r>
-              <a:rPr/>
-              <a:t>Before data collection, to determine required sample size</a:t>
-            </a:r>
-          </a:p>
-          <a:p>
-            <a:pPr lvl="0" indent="-342900" marL="342900">
-              <a:buAutoNum type="arabicPeriod"/>
-            </a:pPr>
-            <a:r>
-              <a:rPr/>
-              <a:t>After a study, to evaluate if the sample size was adequate</a:t>
-            </a:r>
-          </a:p>
-          <a:p>
-            <a:pPr lvl="0" indent="-342900" marL="342900">
-              <a:buAutoNum type="arabicPeriod"/>
-            </a:pPr>
-            <a:r>
-              <a:rPr/>
-              <a:t>To determine the minimum detectable effect size with the given sample</a:t>
+              <a:rPr b="1"/>
+              <a:t>44 trees per side.</a:t>
+            </a:r>
+            <a:r>
+              <a:rPr/>
+              <a:t> We collected four.</a:t>
+            </a:r>
+          </a:p>
+          <a:p>
+            <a:pPr lvl="0" indent="0" marL="1270000">
+              <a:buNone/>
+            </a:pPr>
+            <a:r>
+              <a:rPr sz="2000" b="1"/>
+              <a:t>Note</a:t>
+            </a:r>
+          </a:p>
+          <a:p>
+            <a:pPr lvl="0" indent="0" marL="1270000">
+              <a:buNone/>
+            </a:pPr>
+            <a:r>
+              <a:rPr sz="2000" b="1"/>
+              <a:t>📖 Reference</a:t>
+            </a:r>
+          </a:p>
+          <a:p>
+            <a:pPr lvl="0" indent="0" marL="1270000">
+              <a:buNone/>
+            </a:pPr>
+            <a:r>
+              <a:rPr sz="2000"/>
+              <a:t>Whitlock &amp; Schluter, Ch. 14 — Designing Experiments, includes planning the sample size needed for a study.</a:t>
             </a:r>
           </a:p>
         </p:txBody>
@@ -8889,7 +9319,7 @@
             </a:pPr>
             <a:r>
               <a:rPr sz="2000" b="1"/>
-              <a:t>Note</a:t>
+              <a:t>Warning</a:t>
             </a:r>
           </a:p>
           <a:p>
@@ -8898,7 +9328,7 @@
             </a:pPr>
             <a:r>
               <a:rPr sz="2000" b="1"/>
-              <a:t>✅ Key idea</a:t>
+              <a:t>⚠️ This is why “we found no difference” is usually the wrong conclusion</a:t>
             </a:r>
           </a:p>
           <a:p>
@@ -8907,15 +9337,20 @@
             </a:pPr>
             <a:r>
               <a:rPr sz="2000"/>
-              <a:t>With 97% power, this test has excellent ability to detect the specified effect size. Generally, </a:t>
+              <a:t>A non-significant result from an underpowered study does not mean there is no effect. It means </a:t>
             </a:r>
             <a:r>
               <a:rPr sz="2000" b="1"/>
-              <a:t>80% power is considered acceptable</a:t>
-            </a:r>
+              <a:t>the study could never have found one.</a:t>
+            </a:r>
+          </a:p>
+          <a:p>
+            <a:pPr lvl="0" indent="0" marL="1270000">
+              <a:buNone/>
+            </a:pPr>
             <a:r>
               <a:rPr sz="2000"/>
-              <a:t> — so 97% indicates a very well-powered study for detecting a difference of this size between the groups.</a:t>
+              <a:t>“Absence of evidence is not evidence of absence” — but only if you actually check your power.</a:t>
             </a:r>
           </a:p>
         </p:txBody>
@@ -8955,8 +9390,11 @@
         <p:spPr>
           <a:xfrm>
             <a:off x="0" y="0"/>
-            <a:ext cx="9144000" cy="582780"/>
+            <a:ext cx="9144000" cy="602780"/>
           </a:xfrm>
+          <a:solidFill>
+            <a:srgbClr val="70121D"/>
+          </a:solidFill>
         </p:spPr>
         <p:txBody>
           <a:bodyPr/>
@@ -8967,11 +9405,1295 @@
             </a:pPr>
             <a:r>
               <a:rPr/>
-              <a:t>Part 7 · Error Bars</a:t>
-            </a:r>
-          </a:p>
-        </p:txBody>
-      </p:sp>
+              <a:t>Pairing Buys You Power — Here Is How Much</a:t>
+            </a:r>
+          </a:p>
+        </p:txBody>
+      </p:sp>
+      <p:sp>
+        <p:nvSpPr>
+          <p:cNvPr id="3" name="Content Placeholder 2"/>
+          <p:cNvSpPr>
+            <a:spLocks noGrp="1"/>
+          </p:cNvSpPr>
+          <p:nvPr>
+            <p:ph idx="1" sz="half"/>
+          </p:nvPr>
+        </p:nvSpPr>
+        <p:spPr/>
+        <p:txBody>
+          <a:bodyPr/>
+          <a:lstStyle/>
+          <a:p>
+            <a:pPr lvl="0" indent="0" marL="0">
+              <a:buNone/>
+            </a:pPr>
+            <a:r>
+              <a:rPr/>
+              <a:t>The paired design does not just give a smaller p-value. It changes the </a:t>
+            </a:r>
+            <a:r>
+              <a:rPr b="1"/>
+              <a:t>whole economics of the study.</a:t>
+            </a:r>
+          </a:p>
+          <a:p>
+            <a:pPr lvl="0" indent="0">
+              <a:buNone/>
+            </a:pPr>
+            <a:r>
+              <a:rPr>
+                <a:solidFill>
+                  <a:srgbClr val="003B4F"/>
+                </a:solidFill>
+                <a:latin typeface="Courier"/>
+              </a:rPr>
+              <a:t>p_wide_df &lt;- p_df </a:t>
+            </a:r>
+            <a:r>
+              <a:rPr>
+                <a:solidFill>
+                  <a:srgbClr val="5E5E5E"/>
+                </a:solidFill>
+                <a:latin typeface="Courier"/>
+              </a:rPr>
+              <a:t>%&gt;%</a:t>
+            </a:r>
+            <a:br/>
+            <a:r>
+              <a:rPr>
+                <a:solidFill>
+                  <a:srgbClr val="003B4F"/>
+                </a:solidFill>
+                <a:latin typeface="Courier"/>
+              </a:rPr>
+              <a:t>  </a:t>
+            </a:r>
+            <a:r>
+              <a:rPr>
+                <a:solidFill>
+                  <a:srgbClr val="4758AB"/>
+                </a:solidFill>
+                <a:latin typeface="Courier"/>
+              </a:rPr>
+              <a:t>pivot_wider</a:t>
+            </a:r>
+            <a:r>
+              <a:rPr>
+                <a:solidFill>
+                  <a:srgbClr val="003B4F"/>
+                </a:solidFill>
+                <a:latin typeface="Courier"/>
+              </a:rPr>
+              <a:t>(</a:t>
+            </a:r>
+            <a:r>
+              <a:rPr>
+                <a:solidFill>
+                  <a:srgbClr val="657422"/>
+                </a:solidFill>
+                <a:latin typeface="Courier"/>
+              </a:rPr>
+              <a:t>names_from =</a:t>
+            </a:r>
+            <a:r>
+              <a:rPr>
+                <a:solidFill>
+                  <a:srgbClr val="003B4F"/>
+                </a:solidFill>
+                <a:latin typeface="Courier"/>
+              </a:rPr>
+              <a:t> side, </a:t>
+            </a:r>
+            <a:r>
+              <a:rPr>
+                <a:solidFill>
+                  <a:srgbClr val="657422"/>
+                </a:solidFill>
+                <a:latin typeface="Courier"/>
+              </a:rPr>
+              <a:t>values_from =</a:t>
+            </a:r>
+            <a:r>
+              <a:rPr>
+                <a:solidFill>
+                  <a:srgbClr val="003B4F"/>
+                </a:solidFill>
+                <a:latin typeface="Courier"/>
+              </a:rPr>
+              <a:t> needle_length_mm)</a:t>
+            </a:r>
+            <a:br/>
+            <a:br/>
+            <a:r>
+              <a:rPr>
+                <a:solidFill>
+                  <a:srgbClr val="003B4F"/>
+                </a:solidFill>
+                <a:latin typeface="Courier"/>
+              </a:rPr>
+              <a:t>diffs &lt;- p_wide_df</a:t>
+            </a:r>
+            <a:r>
+              <a:rPr>
+                <a:solidFill>
+                  <a:srgbClr val="5E5E5E"/>
+                </a:solidFill>
+                <a:latin typeface="Courier"/>
+              </a:rPr>
+              <a:t>$</a:t>
+            </a:r>
+            <a:r>
+              <a:rPr>
+                <a:solidFill>
+                  <a:srgbClr val="003B4F"/>
+                </a:solidFill>
+                <a:latin typeface="Courier"/>
+              </a:rPr>
+              <a:t>shady </a:t>
+            </a:r>
+            <a:r>
+              <a:rPr>
+                <a:solidFill>
+                  <a:srgbClr val="5E5E5E"/>
+                </a:solidFill>
+                <a:latin typeface="Courier"/>
+              </a:rPr>
+              <a:t>-</a:t>
+            </a:r>
+            <a:r>
+              <a:rPr>
+                <a:solidFill>
+                  <a:srgbClr val="003B4F"/>
+                </a:solidFill>
+                <a:latin typeface="Courier"/>
+              </a:rPr>
+              <a:t> p_wide_df</a:t>
+            </a:r>
+            <a:r>
+              <a:rPr>
+                <a:solidFill>
+                  <a:srgbClr val="5E5E5E"/>
+                </a:solidFill>
+                <a:latin typeface="Courier"/>
+              </a:rPr>
+              <a:t>$</a:t>
+            </a:r>
+            <a:r>
+              <a:rPr>
+                <a:solidFill>
+                  <a:srgbClr val="003B4F"/>
+                </a:solidFill>
+                <a:latin typeface="Courier"/>
+              </a:rPr>
+              <a:t>sunny</a:t>
+            </a:r>
+            <a:br/>
+            <a:r>
+              <a:rPr>
+                <a:solidFill>
+                  <a:srgbClr val="003B4F"/>
+                </a:solidFill>
+                <a:latin typeface="Courier"/>
+              </a:rPr>
+              <a:t>dz    &lt;- </a:t>
+            </a:r>
+            <a:r>
+              <a:rPr>
+                <a:solidFill>
+                  <a:srgbClr val="4758AB"/>
+                </a:solidFill>
+                <a:latin typeface="Courier"/>
+              </a:rPr>
+              <a:t>abs</a:t>
+            </a:r>
+            <a:r>
+              <a:rPr>
+                <a:solidFill>
+                  <a:srgbClr val="003B4F"/>
+                </a:solidFill>
+                <a:latin typeface="Courier"/>
+              </a:rPr>
+              <a:t>(</a:t>
+            </a:r>
+            <a:r>
+              <a:rPr>
+                <a:solidFill>
+                  <a:srgbClr val="4758AB"/>
+                </a:solidFill>
+                <a:latin typeface="Courier"/>
+              </a:rPr>
+              <a:t>mean</a:t>
+            </a:r>
+            <a:r>
+              <a:rPr>
+                <a:solidFill>
+                  <a:srgbClr val="003B4F"/>
+                </a:solidFill>
+                <a:latin typeface="Courier"/>
+              </a:rPr>
+              <a:t>(diffs)) </a:t>
+            </a:r>
+            <a:r>
+              <a:rPr>
+                <a:solidFill>
+                  <a:srgbClr val="5E5E5E"/>
+                </a:solidFill>
+                <a:latin typeface="Courier"/>
+              </a:rPr>
+              <a:t>/</a:t>
+            </a:r>
+            <a:r>
+              <a:rPr>
+                <a:solidFill>
+                  <a:srgbClr val="003B4F"/>
+                </a:solidFill>
+                <a:latin typeface="Courier"/>
+              </a:rPr>
+              <a:t> </a:t>
+            </a:r>
+            <a:r>
+              <a:rPr>
+                <a:solidFill>
+                  <a:srgbClr val="4758AB"/>
+                </a:solidFill>
+                <a:latin typeface="Courier"/>
+              </a:rPr>
+              <a:t>sd</a:t>
+            </a:r>
+            <a:r>
+              <a:rPr>
+                <a:solidFill>
+                  <a:srgbClr val="003B4F"/>
+                </a:solidFill>
+                <a:latin typeface="Courier"/>
+              </a:rPr>
+              <a:t>(diffs)      </a:t>
+            </a:r>
+            <a:r>
+              <a:rPr>
+                <a:solidFill>
+                  <a:srgbClr val="5E5E5E"/>
+                </a:solidFill>
+                <a:latin typeface="Courier"/>
+              </a:rPr>
+              <a:t># effect size for the DIFFERENCES</a:t>
+            </a:r>
+            <a:br/>
+            <a:br/>
+            <a:r>
+              <a:rPr>
+                <a:solidFill>
+                  <a:srgbClr val="4758AB"/>
+                </a:solidFill>
+                <a:latin typeface="Courier"/>
+              </a:rPr>
+              <a:t>cat</a:t>
+            </a:r>
+            <a:r>
+              <a:rPr>
+                <a:solidFill>
+                  <a:srgbClr val="003B4F"/>
+                </a:solidFill>
+                <a:latin typeface="Courier"/>
+              </a:rPr>
+              <a:t>(</a:t>
+            </a:r>
+            <a:r>
+              <a:rPr>
+                <a:solidFill>
+                  <a:srgbClr val="20794D"/>
+                </a:solidFill>
+                <a:latin typeface="Courier"/>
+              </a:rPr>
+              <a:t>"Differences:"</a:t>
+            </a:r>
+            <a:r>
+              <a:rPr>
+                <a:solidFill>
+                  <a:srgbClr val="003B4F"/>
+                </a:solidFill>
+                <a:latin typeface="Courier"/>
+              </a:rPr>
+              <a:t>, </a:t>
+            </a:r>
+            <a:r>
+              <a:rPr>
+                <a:solidFill>
+                  <a:srgbClr val="4758AB"/>
+                </a:solidFill>
+                <a:latin typeface="Courier"/>
+              </a:rPr>
+              <a:t>round</a:t>
+            </a:r>
+            <a:r>
+              <a:rPr>
+                <a:solidFill>
+                  <a:srgbClr val="003B4F"/>
+                </a:solidFill>
+                <a:latin typeface="Courier"/>
+              </a:rPr>
+              <a:t>(diffs, </a:t>
+            </a:r>
+            <a:r>
+              <a:rPr>
+                <a:solidFill>
+                  <a:srgbClr val="AD0000"/>
+                </a:solidFill>
+                <a:latin typeface="Courier"/>
+              </a:rPr>
+              <a:t>2</a:t>
+            </a:r>
+            <a:r>
+              <a:rPr>
+                <a:solidFill>
+                  <a:srgbClr val="003B4F"/>
+                </a:solidFill>
+                <a:latin typeface="Courier"/>
+              </a:rPr>
+              <a:t>), </a:t>
+            </a:r>
+            <a:r>
+              <a:rPr>
+                <a:solidFill>
+                  <a:srgbClr val="20794D"/>
+                </a:solidFill>
+                <a:latin typeface="Courier"/>
+              </a:rPr>
+              <a:t>"</a:t>
+            </a:r>
+            <a:r>
+              <a:rPr>
+                <a:solidFill>
+                  <a:srgbClr val="5E5E5E"/>
+                </a:solidFill>
+                <a:latin typeface="Courier"/>
+              </a:rPr>
+              <a:t>\n</a:t>
+            </a:r>
+            <a:r>
+              <a:rPr>
+                <a:solidFill>
+                  <a:srgbClr val="20794D"/>
+                </a:solidFill>
+                <a:latin typeface="Courier"/>
+              </a:rPr>
+              <a:t>"</a:t>
+            </a:r>
+            <a:r>
+              <a:rPr>
+                <a:solidFill>
+                  <a:srgbClr val="003B4F"/>
+                </a:solidFill>
+                <a:latin typeface="Courier"/>
+              </a:rPr>
+              <a:t>)</a:t>
+            </a:r>
+          </a:p>
+          <a:p>
+            <a:pPr lvl="0" indent="0">
+              <a:buNone/>
+            </a:pPr>
+            <a:r>
+              <a:rPr>
+                <a:latin typeface="Courier"/>
+              </a:rPr>
+              <a:t>Differences: -1.16 -0.15 -0.97 -2.1 </a:t>
+            </a:r>
+          </a:p>
+          <a:p>
+            <a:pPr lvl="0" indent="0">
+              <a:buNone/>
+            </a:pPr>
+            <a:r>
+              <a:rPr>
+                <a:solidFill>
+                  <a:srgbClr val="4758AB"/>
+                </a:solidFill>
+                <a:latin typeface="Courier"/>
+              </a:rPr>
+              <a:t>cat</a:t>
+            </a:r>
+            <a:r>
+              <a:rPr>
+                <a:solidFill>
+                  <a:srgbClr val="003B4F"/>
+                </a:solidFill>
+                <a:latin typeface="Courier"/>
+              </a:rPr>
+              <a:t>(</a:t>
+            </a:r>
+            <a:r>
+              <a:rPr>
+                <a:solidFill>
+                  <a:srgbClr val="20794D"/>
+                </a:solidFill>
+                <a:latin typeface="Courier"/>
+              </a:rPr>
+              <a:t>"Cohen's dz ="</a:t>
+            </a:r>
+            <a:r>
+              <a:rPr>
+                <a:solidFill>
+                  <a:srgbClr val="003B4F"/>
+                </a:solidFill>
+                <a:latin typeface="Courier"/>
+              </a:rPr>
+              <a:t>, </a:t>
+            </a:r>
+            <a:r>
+              <a:rPr>
+                <a:solidFill>
+                  <a:srgbClr val="4758AB"/>
+                </a:solidFill>
+                <a:latin typeface="Courier"/>
+              </a:rPr>
+              <a:t>round</a:t>
+            </a:r>
+            <a:r>
+              <a:rPr>
+                <a:solidFill>
+                  <a:srgbClr val="003B4F"/>
+                </a:solidFill>
+                <a:latin typeface="Courier"/>
+              </a:rPr>
+              <a:t>(dz, </a:t>
+            </a:r>
+            <a:r>
+              <a:rPr>
+                <a:solidFill>
+                  <a:srgbClr val="AD0000"/>
+                </a:solidFill>
+                <a:latin typeface="Courier"/>
+              </a:rPr>
+              <a:t>2</a:t>
+            </a:r>
+            <a:r>
+              <a:rPr>
+                <a:solidFill>
+                  <a:srgbClr val="003B4F"/>
+                </a:solidFill>
+                <a:latin typeface="Courier"/>
+              </a:rPr>
+              <a:t>), </a:t>
+            </a:r>
+            <a:r>
+              <a:rPr>
+                <a:solidFill>
+                  <a:srgbClr val="20794D"/>
+                </a:solidFill>
+                <a:latin typeface="Courier"/>
+              </a:rPr>
+              <a:t>"</a:t>
+            </a:r>
+            <a:r>
+              <a:rPr>
+                <a:solidFill>
+                  <a:srgbClr val="5E5E5E"/>
+                </a:solidFill>
+                <a:latin typeface="Courier"/>
+              </a:rPr>
+              <a:t>\n\n</a:t>
+            </a:r>
+            <a:r>
+              <a:rPr>
+                <a:solidFill>
+                  <a:srgbClr val="20794D"/>
+                </a:solidFill>
+                <a:latin typeface="Courier"/>
+              </a:rPr>
+              <a:t>"</a:t>
+            </a:r>
+            <a:r>
+              <a:rPr>
+                <a:solidFill>
+                  <a:srgbClr val="003B4F"/>
+                </a:solidFill>
+                <a:latin typeface="Courier"/>
+              </a:rPr>
+              <a:t>)</a:t>
+            </a:r>
+          </a:p>
+          <a:p>
+            <a:pPr lvl="0" indent="0">
+              <a:buNone/>
+            </a:pPr>
+            <a:r>
+              <a:rPr>
+                <a:latin typeface="Courier"/>
+              </a:rPr>
+              <a:t>Cohen's dz = 1.36 </a:t>
+            </a:r>
+          </a:p>
+          <a:p>
+            <a:pPr lvl="0" indent="0">
+              <a:buNone/>
+            </a:pPr>
+            <a:r>
+              <a:rPr>
+                <a:solidFill>
+                  <a:srgbClr val="4758AB"/>
+                </a:solidFill>
+                <a:latin typeface="Courier"/>
+              </a:rPr>
+              <a:t>cat</a:t>
+            </a:r>
+            <a:r>
+              <a:rPr>
+                <a:solidFill>
+                  <a:srgbClr val="003B4F"/>
+                </a:solidFill>
+                <a:latin typeface="Courier"/>
+              </a:rPr>
+              <a:t>(</a:t>
+            </a:r>
+            <a:r>
+              <a:rPr>
+                <a:solidFill>
+                  <a:srgbClr val="20794D"/>
+                </a:solidFill>
+                <a:latin typeface="Courier"/>
+              </a:rPr>
+              <a:t>"Paired power at n = 4:"</a:t>
+            </a:r>
+            <a:r>
+              <a:rPr>
+                <a:solidFill>
+                  <a:srgbClr val="003B4F"/>
+                </a:solidFill>
+                <a:latin typeface="Courier"/>
+              </a:rPr>
+              <a:t>,</a:t>
+            </a:r>
+            <a:br/>
+            <a:r>
+              <a:rPr>
+                <a:solidFill>
+                  <a:srgbClr val="003B4F"/>
+                </a:solidFill>
+                <a:latin typeface="Courier"/>
+              </a:rPr>
+              <a:t>    </a:t>
+            </a:r>
+            <a:r>
+              <a:rPr>
+                <a:solidFill>
+                  <a:srgbClr val="4758AB"/>
+                </a:solidFill>
+                <a:latin typeface="Courier"/>
+              </a:rPr>
+              <a:t>round</a:t>
+            </a:r>
+            <a:r>
+              <a:rPr>
+                <a:solidFill>
+                  <a:srgbClr val="003B4F"/>
+                </a:solidFill>
+                <a:latin typeface="Courier"/>
+              </a:rPr>
+              <a:t>(</a:t>
+            </a:r>
+            <a:r>
+              <a:rPr>
+                <a:solidFill>
+                  <a:srgbClr val="4758AB"/>
+                </a:solidFill>
+                <a:latin typeface="Courier"/>
+              </a:rPr>
+              <a:t>power.t.test</a:t>
+            </a:r>
+            <a:r>
+              <a:rPr>
+                <a:solidFill>
+                  <a:srgbClr val="003B4F"/>
+                </a:solidFill>
+                <a:latin typeface="Courier"/>
+              </a:rPr>
+              <a:t>(</a:t>
+            </a:r>
+            <a:r>
+              <a:rPr>
+                <a:solidFill>
+                  <a:srgbClr val="657422"/>
+                </a:solidFill>
+                <a:latin typeface="Courier"/>
+              </a:rPr>
+              <a:t>n =</a:t>
+            </a:r>
+            <a:r>
+              <a:rPr>
+                <a:solidFill>
+                  <a:srgbClr val="003B4F"/>
+                </a:solidFill>
+                <a:latin typeface="Courier"/>
+              </a:rPr>
+              <a:t> </a:t>
+            </a:r>
+            <a:r>
+              <a:rPr>
+                <a:solidFill>
+                  <a:srgbClr val="AD0000"/>
+                </a:solidFill>
+                <a:latin typeface="Courier"/>
+              </a:rPr>
+              <a:t>4</a:t>
+            </a:r>
+            <a:r>
+              <a:rPr>
+                <a:solidFill>
+                  <a:srgbClr val="003B4F"/>
+                </a:solidFill>
+                <a:latin typeface="Courier"/>
+              </a:rPr>
+              <a:t>, </a:t>
+            </a:r>
+            <a:r>
+              <a:rPr>
+                <a:solidFill>
+                  <a:srgbClr val="657422"/>
+                </a:solidFill>
+                <a:latin typeface="Courier"/>
+              </a:rPr>
+              <a:t>delta =</a:t>
+            </a:r>
+            <a:r>
+              <a:rPr>
+                <a:solidFill>
+                  <a:srgbClr val="003B4F"/>
+                </a:solidFill>
+                <a:latin typeface="Courier"/>
+              </a:rPr>
+              <a:t> dz, </a:t>
+            </a:r>
+            <a:r>
+              <a:rPr>
+                <a:solidFill>
+                  <a:srgbClr val="657422"/>
+                </a:solidFill>
+                <a:latin typeface="Courier"/>
+              </a:rPr>
+              <a:t>sd =</a:t>
+            </a:r>
+            <a:r>
+              <a:rPr>
+                <a:solidFill>
+                  <a:srgbClr val="003B4F"/>
+                </a:solidFill>
+                <a:latin typeface="Courier"/>
+              </a:rPr>
+              <a:t> </a:t>
+            </a:r>
+            <a:r>
+              <a:rPr>
+                <a:solidFill>
+                  <a:srgbClr val="AD0000"/>
+                </a:solidFill>
+                <a:latin typeface="Courier"/>
+              </a:rPr>
+              <a:t>1</a:t>
+            </a:r>
+            <a:r>
+              <a:rPr>
+                <a:solidFill>
+                  <a:srgbClr val="003B4F"/>
+                </a:solidFill>
+                <a:latin typeface="Courier"/>
+              </a:rPr>
+              <a:t>,</a:t>
+            </a:r>
+            <a:br/>
+            <a:r>
+              <a:rPr>
+                <a:solidFill>
+                  <a:srgbClr val="003B4F"/>
+                </a:solidFill>
+                <a:latin typeface="Courier"/>
+              </a:rPr>
+              <a:t>                       </a:t>
+            </a:r>
+            <a:r>
+              <a:rPr>
+                <a:solidFill>
+                  <a:srgbClr val="657422"/>
+                </a:solidFill>
+                <a:latin typeface="Courier"/>
+              </a:rPr>
+              <a:t>type =</a:t>
+            </a:r>
+            <a:r>
+              <a:rPr>
+                <a:solidFill>
+                  <a:srgbClr val="003B4F"/>
+                </a:solidFill>
+                <a:latin typeface="Courier"/>
+              </a:rPr>
+              <a:t> </a:t>
+            </a:r>
+            <a:r>
+              <a:rPr>
+                <a:solidFill>
+                  <a:srgbClr val="20794D"/>
+                </a:solidFill>
+                <a:latin typeface="Courier"/>
+              </a:rPr>
+              <a:t>"paired"</a:t>
+            </a:r>
+            <a:r>
+              <a:rPr>
+                <a:solidFill>
+                  <a:srgbClr val="003B4F"/>
+                </a:solidFill>
+                <a:latin typeface="Courier"/>
+              </a:rPr>
+              <a:t>)</a:t>
+            </a:r>
+            <a:r>
+              <a:rPr>
+                <a:solidFill>
+                  <a:srgbClr val="5E5E5E"/>
+                </a:solidFill>
+                <a:latin typeface="Courier"/>
+              </a:rPr>
+              <a:t>$</a:t>
+            </a:r>
+            <a:r>
+              <a:rPr>
+                <a:solidFill>
+                  <a:srgbClr val="003B4F"/>
+                </a:solidFill>
+                <a:latin typeface="Courier"/>
+              </a:rPr>
+              <a:t>power, </a:t>
+            </a:r>
+            <a:r>
+              <a:rPr>
+                <a:solidFill>
+                  <a:srgbClr val="AD0000"/>
+                </a:solidFill>
+                <a:latin typeface="Courier"/>
+              </a:rPr>
+              <a:t>3</a:t>
+            </a:r>
+            <a:r>
+              <a:rPr>
+                <a:solidFill>
+                  <a:srgbClr val="003B4F"/>
+                </a:solidFill>
+                <a:latin typeface="Courier"/>
+              </a:rPr>
+              <a:t>), </a:t>
+            </a:r>
+            <a:r>
+              <a:rPr>
+                <a:solidFill>
+                  <a:srgbClr val="20794D"/>
+                </a:solidFill>
+                <a:latin typeface="Courier"/>
+              </a:rPr>
+              <a:t>"</a:t>
+            </a:r>
+            <a:r>
+              <a:rPr>
+                <a:solidFill>
+                  <a:srgbClr val="5E5E5E"/>
+                </a:solidFill>
+                <a:latin typeface="Courier"/>
+              </a:rPr>
+              <a:t>\n</a:t>
+            </a:r>
+            <a:r>
+              <a:rPr>
+                <a:solidFill>
+                  <a:srgbClr val="20794D"/>
+                </a:solidFill>
+                <a:latin typeface="Courier"/>
+              </a:rPr>
+              <a:t>"</a:t>
+            </a:r>
+            <a:r>
+              <a:rPr>
+                <a:solidFill>
+                  <a:srgbClr val="003B4F"/>
+                </a:solidFill>
+                <a:latin typeface="Courier"/>
+              </a:rPr>
+              <a:t>)</a:t>
+            </a:r>
+          </a:p>
+          <a:p>
+            <a:pPr lvl="0" indent="0">
+              <a:buNone/>
+            </a:pPr>
+            <a:r>
+              <a:rPr>
+                <a:latin typeface="Courier"/>
+              </a:rPr>
+              <a:t>Paired power at n = 4: 0.464 </a:t>
+            </a:r>
+          </a:p>
+          <a:p>
+            <a:pPr lvl="0" indent="0">
+              <a:buNone/>
+            </a:pPr>
+            <a:r>
+              <a:rPr>
+                <a:solidFill>
+                  <a:srgbClr val="4758AB"/>
+                </a:solidFill>
+                <a:latin typeface="Courier"/>
+              </a:rPr>
+              <a:t>cat</a:t>
+            </a:r>
+            <a:r>
+              <a:rPr>
+                <a:solidFill>
+                  <a:srgbClr val="003B4F"/>
+                </a:solidFill>
+                <a:latin typeface="Courier"/>
+              </a:rPr>
+              <a:t>(</a:t>
+            </a:r>
+            <a:r>
+              <a:rPr>
+                <a:solidFill>
+                  <a:srgbClr val="20794D"/>
+                </a:solidFill>
+                <a:latin typeface="Courier"/>
+              </a:rPr>
+              <a:t>"Trees needed for 80% power, paired:"</a:t>
+            </a:r>
+            <a:r>
+              <a:rPr>
+                <a:solidFill>
+                  <a:srgbClr val="003B4F"/>
+                </a:solidFill>
+                <a:latin typeface="Courier"/>
+              </a:rPr>
+              <a:t>,</a:t>
+            </a:r>
+            <a:br/>
+            <a:r>
+              <a:rPr>
+                <a:solidFill>
+                  <a:srgbClr val="003B4F"/>
+                </a:solidFill>
+                <a:latin typeface="Courier"/>
+              </a:rPr>
+              <a:t>    </a:t>
+            </a:r>
+            <a:r>
+              <a:rPr>
+                <a:solidFill>
+                  <a:srgbClr val="4758AB"/>
+                </a:solidFill>
+                <a:latin typeface="Courier"/>
+              </a:rPr>
+              <a:t>ceiling</a:t>
+            </a:r>
+            <a:r>
+              <a:rPr>
+                <a:solidFill>
+                  <a:srgbClr val="003B4F"/>
+                </a:solidFill>
+                <a:latin typeface="Courier"/>
+              </a:rPr>
+              <a:t>(</a:t>
+            </a:r>
+            <a:r>
+              <a:rPr>
+                <a:solidFill>
+                  <a:srgbClr val="4758AB"/>
+                </a:solidFill>
+                <a:latin typeface="Courier"/>
+              </a:rPr>
+              <a:t>power.t.test</a:t>
+            </a:r>
+            <a:r>
+              <a:rPr>
+                <a:solidFill>
+                  <a:srgbClr val="003B4F"/>
+                </a:solidFill>
+                <a:latin typeface="Courier"/>
+              </a:rPr>
+              <a:t>(</a:t>
+            </a:r>
+            <a:r>
+              <a:rPr>
+                <a:solidFill>
+                  <a:srgbClr val="657422"/>
+                </a:solidFill>
+                <a:latin typeface="Courier"/>
+              </a:rPr>
+              <a:t>delta =</a:t>
+            </a:r>
+            <a:r>
+              <a:rPr>
+                <a:solidFill>
+                  <a:srgbClr val="003B4F"/>
+                </a:solidFill>
+                <a:latin typeface="Courier"/>
+              </a:rPr>
+              <a:t> dz, </a:t>
+            </a:r>
+            <a:r>
+              <a:rPr>
+                <a:solidFill>
+                  <a:srgbClr val="657422"/>
+                </a:solidFill>
+                <a:latin typeface="Courier"/>
+              </a:rPr>
+              <a:t>sd =</a:t>
+            </a:r>
+            <a:r>
+              <a:rPr>
+                <a:solidFill>
+                  <a:srgbClr val="003B4F"/>
+                </a:solidFill>
+                <a:latin typeface="Courier"/>
+              </a:rPr>
+              <a:t> </a:t>
+            </a:r>
+            <a:r>
+              <a:rPr>
+                <a:solidFill>
+                  <a:srgbClr val="AD0000"/>
+                </a:solidFill>
+                <a:latin typeface="Courier"/>
+              </a:rPr>
+              <a:t>1</a:t>
+            </a:r>
+            <a:r>
+              <a:rPr>
+                <a:solidFill>
+                  <a:srgbClr val="003B4F"/>
+                </a:solidFill>
+                <a:latin typeface="Courier"/>
+              </a:rPr>
+              <a:t>, </a:t>
+            </a:r>
+            <a:r>
+              <a:rPr>
+                <a:solidFill>
+                  <a:srgbClr val="657422"/>
+                </a:solidFill>
+                <a:latin typeface="Courier"/>
+              </a:rPr>
+              <a:t>power =</a:t>
+            </a:r>
+            <a:r>
+              <a:rPr>
+                <a:solidFill>
+                  <a:srgbClr val="003B4F"/>
+                </a:solidFill>
+                <a:latin typeface="Courier"/>
+              </a:rPr>
+              <a:t> </a:t>
+            </a:r>
+            <a:r>
+              <a:rPr>
+                <a:solidFill>
+                  <a:srgbClr val="AD0000"/>
+                </a:solidFill>
+                <a:latin typeface="Courier"/>
+              </a:rPr>
+              <a:t>0.80</a:t>
+            </a:r>
+            <a:r>
+              <a:rPr>
+                <a:solidFill>
+                  <a:srgbClr val="003B4F"/>
+                </a:solidFill>
+                <a:latin typeface="Courier"/>
+              </a:rPr>
+              <a:t>,</a:t>
+            </a:r>
+            <a:br/>
+            <a:r>
+              <a:rPr>
+                <a:solidFill>
+                  <a:srgbClr val="003B4F"/>
+                </a:solidFill>
+                <a:latin typeface="Courier"/>
+              </a:rPr>
+              <a:t>                         </a:t>
+            </a:r>
+            <a:r>
+              <a:rPr>
+                <a:solidFill>
+                  <a:srgbClr val="657422"/>
+                </a:solidFill>
+                <a:latin typeface="Courier"/>
+              </a:rPr>
+              <a:t>type =</a:t>
+            </a:r>
+            <a:r>
+              <a:rPr>
+                <a:solidFill>
+                  <a:srgbClr val="003B4F"/>
+                </a:solidFill>
+                <a:latin typeface="Courier"/>
+              </a:rPr>
+              <a:t> </a:t>
+            </a:r>
+            <a:r>
+              <a:rPr>
+                <a:solidFill>
+                  <a:srgbClr val="20794D"/>
+                </a:solidFill>
+                <a:latin typeface="Courier"/>
+              </a:rPr>
+              <a:t>"paired"</a:t>
+            </a:r>
+            <a:r>
+              <a:rPr>
+                <a:solidFill>
+                  <a:srgbClr val="003B4F"/>
+                </a:solidFill>
+                <a:latin typeface="Courier"/>
+              </a:rPr>
+              <a:t>)</a:t>
+            </a:r>
+            <a:r>
+              <a:rPr>
+                <a:solidFill>
+                  <a:srgbClr val="5E5E5E"/>
+                </a:solidFill>
+                <a:latin typeface="Courier"/>
+              </a:rPr>
+              <a:t>$</a:t>
+            </a:r>
+            <a:r>
+              <a:rPr>
+                <a:solidFill>
+                  <a:srgbClr val="003B4F"/>
+                </a:solidFill>
+                <a:latin typeface="Courier"/>
+              </a:rPr>
+              <a:t>n), </a:t>
+            </a:r>
+            <a:r>
+              <a:rPr>
+                <a:solidFill>
+                  <a:srgbClr val="20794D"/>
+                </a:solidFill>
+                <a:latin typeface="Courier"/>
+              </a:rPr>
+              <a:t>"</a:t>
+            </a:r>
+            <a:r>
+              <a:rPr>
+                <a:solidFill>
+                  <a:srgbClr val="5E5E5E"/>
+                </a:solidFill>
+                <a:latin typeface="Courier"/>
+              </a:rPr>
+              <a:t>\n</a:t>
+            </a:r>
+            <a:r>
+              <a:rPr>
+                <a:solidFill>
+                  <a:srgbClr val="20794D"/>
+                </a:solidFill>
+                <a:latin typeface="Courier"/>
+              </a:rPr>
+              <a:t>"</a:t>
+            </a:r>
+            <a:r>
+              <a:rPr>
+                <a:solidFill>
+                  <a:srgbClr val="003B4F"/>
+                </a:solidFill>
+                <a:latin typeface="Courier"/>
+              </a:rPr>
+              <a:t>)</a:t>
+            </a:r>
+          </a:p>
+          <a:p>
+            <a:pPr lvl="0" indent="0">
+              <a:buNone/>
+            </a:pPr>
+            <a:r>
+              <a:rPr>
+                <a:latin typeface="Courier"/>
+              </a:rPr>
+              <a:t>Trees needed for 80% power, paired: 7 </a:t>
+            </a:r>
+          </a:p>
+        </p:txBody>
+      </p:sp>
+      <p:graphicFrame>
+        <p:nvGraphicFramePr>
+          <p:cNvPr id="6" name="Content Placeholder 5"/>
+          <p:cNvGraphicFramePr>
+            <a:graphicFrameLocks noGrp="1"/>
+          </p:cNvGraphicFramePr>
+          <p:nvPr>
+            <p:ph idx="1"/>
+          </p:nvPr>
+        </p:nvGraphicFramePr>
+        <p:xfrm>
+          <a:off x="6121400" y="660400"/>
+          <a:ext cx="2781300" cy="4470400"/>
+        </p:xfrm>
+        <a:graphic>
+          <a:graphicData uri="http://schemas.openxmlformats.org/drawingml/2006/table">
+            <a:tbl>
+              <a:tblPr firstRow="1" bandRow="1">
+                <a:tableStyleId>{5C22544A-7EE6-4342-B048-85BDC9FD1C3A}</a:tableStyleId>
+              </a:tblPr>
+              <a:tblGrid>
+                <a:gridCol w="927100"/>
+                <a:gridCol w="927100"/>
+                <a:gridCol w="927100"/>
+              </a:tblGrid>
+              <a:tr h="0">
+                <a:tc>
+                  <a:txBody>
+                    <a:bodyPr/>
+                    <a:lstStyle/>
+                    <a:p>
+                      <a:pPr lvl="0" indent="0" marL="0">
+                        <a:buNone/>
+                      </a:pPr>
+                      <a:r>
+                        <a:rPr/>
+                        <a:t>Design</a:t>
+                      </a:r>
+                    </a:p>
+                  </a:txBody>
+                  <a:tcPr/>
+                </a:tc>
+                <a:tc>
+                  <a:txBody>
+                    <a:bodyPr/>
+                    <a:lstStyle/>
+                    <a:p>
+                      <a:pPr lvl="0" indent="0" marL="0">
+                        <a:buNone/>
+                      </a:pPr>
+                      <a:r>
+                        <a:rPr/>
+                        <a:t>Power at n = 4</a:t>
+                      </a:r>
+                    </a:p>
+                  </a:txBody>
+                  <a:tcPr/>
+                </a:tc>
+                <a:tc>
+                  <a:txBody>
+                    <a:bodyPr/>
+                    <a:lstStyle/>
+                    <a:p>
+                      <a:pPr lvl="0" indent="0" marL="0">
+                        <a:buNone/>
+                      </a:pPr>
+                      <a:r>
+                        <a:rPr/>
+                        <a:t>Trees for 80%</a:t>
+                      </a:r>
+                    </a:p>
+                  </a:txBody>
+                  <a:tcPr/>
+                </a:tc>
+              </a:tr>
+              <a:tr h="0">
+                <a:tc>
+                  <a:txBody>
+                    <a:bodyPr/>
+                    <a:lstStyle/>
+                    <a:p>
+                      <a:pPr lvl="0" indent="0" marL="0">
+                        <a:buNone/>
+                      </a:pPr>
+                      <a:r>
+                        <a:rPr/>
+                        <a:t>Unpaired</a:t>
+                      </a:r>
+                    </a:p>
+                  </a:txBody>
+                </a:tc>
+                <a:tc>
+                  <a:txBody>
+                    <a:bodyPr/>
+                    <a:lstStyle/>
+                    <a:p>
+                      <a:pPr lvl="0" indent="0" marL="0">
+                        <a:buNone/>
+                      </a:pPr>
+                      <a:r>
+                        <a:rPr/>
+                        <a:t>11%</a:t>
+                      </a:r>
+                    </a:p>
+                  </a:txBody>
+                </a:tc>
+                <a:tc>
+                  <a:txBody>
+                    <a:bodyPr/>
+                    <a:lstStyle/>
+                    <a:p>
+                      <a:pPr lvl="0" indent="0" marL="0">
+                        <a:buNone/>
+                      </a:pPr>
+                      <a:r>
+                        <a:rPr b="1"/>
+                        <a:t>44 per side</a:t>
+                      </a:r>
+                    </a:p>
+                  </a:txBody>
+                </a:tc>
+              </a:tr>
+              <a:tr h="0">
+                <a:tc>
+                  <a:txBody>
+                    <a:bodyPr/>
+                    <a:lstStyle/>
+                    <a:p>
+                      <a:pPr lvl="0" indent="0" marL="0">
+                        <a:buNone/>
+                      </a:pPr>
+                      <a:r>
+                        <a:rPr/>
+                        <a:t>Paired</a:t>
+                      </a:r>
+                    </a:p>
+                  </a:txBody>
+                </a:tc>
+                <a:tc>
+                  <a:txBody>
+                    <a:bodyPr/>
+                    <a:lstStyle/>
+                    <a:p>
+                      <a:pPr lvl="0" indent="0" marL="0">
+                        <a:buNone/>
+                      </a:pPr>
+                      <a:r>
+                        <a:rPr/>
+                        <a:t>46%</a:t>
+                      </a:r>
+                    </a:p>
+                  </a:txBody>
+                </a:tc>
+                <a:tc>
+                  <a:txBody>
+                    <a:bodyPr/>
+                    <a:lstStyle/>
+                    <a:p>
+                      <a:pPr lvl="0" indent="0" marL="0">
+                        <a:buNone/>
+                      </a:pPr>
+                      <a:r>
+                        <a:rPr b="1"/>
+                        <a:t>7 total</a:t>
+                      </a:r>
+                    </a:p>
+                  </a:txBody>
+                </a:tc>
+              </a:tr>
+            </a:tbl>
+          </a:graphicData>
+        </a:graphic>
+      </p:graphicFrame>
     </p:spTree>
   </p:cSld>
 </p:sld>
@@ -9022,7 +10744,7 @@
             </a:pPr>
             <a:r>
               <a:rPr/>
-              <a:t>Error Bars and Their Interpretation</a:t>
+              <a:t>What Is Power?</a:t>
             </a:r>
           </a:p>
         </p:txBody>
@@ -9047,52 +10769,11 @@
             </a:pPr>
             <a:r>
               <a:rPr/>
-              <a:t>Error bars are graphical representations of the variability of data that show:</a:t>
-            </a:r>
-          </a:p>
-          <a:p>
-            <a:pPr lvl="0"/>
-            <a:r>
-              <a:rPr/>
-              <a:t>The </a:t>
+              <a:t>Statistical power is the probability of detecting a true effect — of rejecting the null hypothesis when it really is false. Power of 80% means an 80% chance of finding a difference of a given size, </a:t>
             </a:r>
             <a:r>
               <a:rPr b="1"/>
-              <a:t>precision</a:t>
-            </a:r>
-            <a:r>
-              <a:rPr/>
-              <a:t> of a measurement</a:t>
-            </a:r>
-          </a:p>
-          <a:p>
-            <a:pPr lvl="0"/>
-            <a:r>
-              <a:rPr/>
-              <a:t>The </a:t>
-            </a:r>
-            <a:r>
-              <a:rPr b="1"/>
-              <a:t>uncertainty</a:t>
-            </a:r>
-            <a:r>
-              <a:rPr/>
-              <a:t> around an estimate</a:t>
-            </a:r>
-          </a:p>
-          <a:p>
-            <a:pPr lvl="0"/>
-            <a:r>
-              <a:rPr/>
-              <a:t>A </a:t>
-            </a:r>
-            <a:r>
-              <a:rPr b="1"/>
-              <a:t>confidence interval</a:t>
-            </a:r>
-            <a:r>
-              <a:rPr/>
-              <a:t> for a parameter</a:t>
+              <a:t>if that difference is actually there.</a:t>
             </a:r>
           </a:p>
           <a:p>
@@ -9101,7 +10782,7 @@
             </a:pPr>
             <a:r>
               <a:rPr/>
-              <a:t>Common types of error bars:</a:t>
+              <a:t>A power analysis is typically done for one of these purposes:</a:t>
             </a:r>
           </a:p>
           <a:p>
@@ -9110,11 +10791,11 @@
             </a:pPr>
             <a:r>
               <a:rPr b="1"/>
-              <a:t>Standard Error (SE)</a:t>
-            </a:r>
-            <a:r>
-              <a:rPr/>
-              <a:t> — shows precision of the mean</a:t>
+              <a:t>Before data collection</a:t>
+            </a:r>
+            <a:r>
+              <a:rPr/>
+              <a:t>, to determine required sample size — by far the most useful</a:t>
             </a:r>
           </a:p>
           <a:p>
@@ -9122,12 +10803,8 @@
               <a:buAutoNum type="arabicPeriod"/>
             </a:pPr>
             <a:r>
-              <a:rPr b="1"/>
-              <a:t>Standard Deviation (SD)</a:t>
-            </a:r>
-            <a:r>
-              <a:rPr/>
-              <a:t> — shows variability in the data</a:t>
+              <a:rPr/>
+              <a:t>After a study, to evaluate whether the sample size was adequate</a:t>
             </a:r>
           </a:p>
           <a:p>
@@ -9135,76 +10812,127 @@
               <a:buAutoNum type="arabicPeriod"/>
             </a:pPr>
             <a:r>
-              <a:rPr b="1"/>
-              <a:t>Confidence Interval (CI)</a:t>
-            </a:r>
-            <a:r>
-              <a:rPr/>
-              <a:t> — shows the plausible range for a parameter</a:t>
-            </a:r>
-          </a:p>
-          <a:p>
-            <a:pPr lvl="0" indent="0" marL="0">
-              <a:buNone/>
-            </a:pPr>
-            <a:r>
-              <a:rPr/>
-              <a:t>When interpreting graphs:</a:t>
-            </a:r>
-          </a:p>
-          <a:p>
-            <a:pPr lvl="0"/>
-            <a:r>
-              <a:rPr/>
-              <a:t>Always check what the error bars represent</a:t>
-            </a:r>
-          </a:p>
-          <a:p>
-            <a:pPr lvl="0"/>
-            <a:r>
-              <a:rPr/>
-              <a:t>Non-overlapping 95% CI bars suggest statistically significant differences</a:t>
-            </a:r>
-          </a:p>
-          <a:p>
-            <a:pPr lvl="0"/>
-            <a:r>
-              <a:rPr/>
-              <a:t>Error bars help assess both statistical and practical significance</a:t>
-            </a:r>
-          </a:p>
-        </p:txBody>
-      </p:sp>
-      <p:pic>
-        <p:nvPicPr>
-          <p:cNvPr descr="power_and_error_lecture_files/figure-pptx/unnamed-chunk-6-1.png" id="0" name="Picture 1"/>
-          <p:cNvPicPr>
-            <a:picLocks noGrp="1" noChangeAspect="1"/>
-          </p:cNvPicPr>
-          <p:nvPr/>
-        </p:nvPicPr>
-        <p:blipFill>
-          <a:blip r:embed="rId2"/>
-          <a:stretch>
-            <a:fillRect/>
-          </a:stretch>
-        </p:blipFill>
-        <p:spPr bwMode="auto">
-          <a:xfrm>
-            <a:off x="6121400" y="1587500"/>
-            <a:ext cx="2781300" cy="2616200"/>
-          </a:xfrm>
-          <a:prstGeom prst="rect">
-            <a:avLst/>
-          </a:prstGeom>
-          <a:noFill/>
-          <a:ln w="9525">
-            <a:noFill/>
-            <a:headEnd/>
-            <a:tailEnd/>
-          </a:ln>
-        </p:spPr>
-      </p:pic>
+              <a:rPr/>
+              <a:t>To determine the minimum detectable effect size with the sample you have</a:t>
+            </a:r>
+          </a:p>
+          <a:p>
+            <a:pPr lvl="0" indent="0" marL="1270000">
+              <a:buNone/>
+            </a:pPr>
+            <a:r>
+              <a:rPr sz="2000" b="1"/>
+              <a:t>Note</a:t>
+            </a:r>
+          </a:p>
+          <a:p>
+            <a:pPr lvl="0" indent="0" marL="1270000">
+              <a:buNone/>
+            </a:pPr>
+            <a:r>
+              <a:rPr sz="2000" b="1"/>
+              <a:t>✅ Key idea</a:t>
+            </a:r>
+          </a:p>
+          <a:p>
+            <a:pPr lvl="0" indent="0" marL="1270000">
+              <a:buNone/>
+            </a:pPr>
+            <a:r>
+              <a:rPr sz="2000" b="1"/>
+              <a:t>80% power is the usual convention</a:t>
+            </a:r>
+            <a:r>
+              <a:rPr sz="2000"/>
+              <a:t> for an adequately powered study. Our unpaired pine analysis has 11%, and our paired analysis 46% — both below it. This is a </a:t>
+            </a:r>
+            <a:r>
+              <a:rPr sz="2000" i="1"/>
+              <a:t>pilot study</a:t>
+            </a:r>
+            <a:r>
+              <a:rPr sz="2000"/>
+              <a:t>: enough to estimate an effect size and plan a real one, not enough to settle the question.</a:t>
+            </a:r>
+          </a:p>
+        </p:txBody>
+      </p:sp>
+      <p:sp>
+        <p:nvSpPr>
+          <p:cNvPr id="4" name="Content Placeholder 3"/>
+          <p:cNvSpPr>
+            <a:spLocks noGrp="1"/>
+          </p:cNvSpPr>
+          <p:nvPr>
+            <p:ph idx="2" sz="half"/>
+          </p:nvPr>
+        </p:nvSpPr>
+        <p:spPr/>
+        <p:txBody>
+          <a:bodyPr/>
+          <a:lstStyle/>
+          <a:p>
+            <a:pPr lvl="0" indent="0" marL="1270000">
+              <a:buNone/>
+            </a:pPr>
+            <a:r>
+              <a:rPr sz="2000" b="1"/>
+              <a:t>Warning</a:t>
+            </a:r>
+          </a:p>
+          <a:p>
+            <a:pPr lvl="0" indent="0" marL="1270000">
+              <a:buNone/>
+            </a:pPr>
+            <a:r>
+              <a:rPr sz="2000" b="1"/>
+              <a:t>⚠️ A warning about “post-hoc power”</a:t>
+            </a:r>
+          </a:p>
+          <a:p>
+            <a:pPr lvl="0" indent="0" marL="1270000">
+              <a:buNone/>
+            </a:pPr>
+            <a:r>
+              <a:rPr sz="2000"/>
+              <a:t>Computing power </a:t>
+            </a:r>
+            <a:r>
+              <a:rPr sz="2000" i="1"/>
+              <a:t>from the effect size you observed</a:t>
+            </a:r>
+            <a:r>
+              <a:rPr sz="2000"/>
+              <a:t> — which is exactly what we just did — is a known trap. It is fine for what we used it for: </a:t>
+            </a:r>
+            <a:r>
+              <a:rPr sz="2000" b="1"/>
+              <a:t>planning the next study</a:t>
+            </a:r>
+            <a:r>
+              <a:rPr sz="2000"/>
+              <a:t>.</a:t>
+            </a:r>
+          </a:p>
+          <a:p>
+            <a:pPr lvl="0" indent="0" marL="1270000">
+              <a:buNone/>
+            </a:pPr>
+            <a:r>
+              <a:rPr sz="2000"/>
+              <a:t>It is </a:t>
+            </a:r>
+            <a:r>
+              <a:rPr sz="2000" b="1"/>
+              <a:t>not</a:t>
+            </a:r>
+            <a:r>
+              <a:rPr sz="2000"/>
+              <a:t> a valid way to explain away a non-significant result, because observed power is just a re-expression of the p-value. If someone reports “our result was non-significant but we had low power,” they have said the same thing twice.</a:t>
+            </a:r>
+          </a:p>
+        </p:txBody>
+      </p:sp>
     </p:spTree>
   </p:cSld>
 </p:sld>
@@ -9252,7 +10980,7 @@
             </a:pPr>
             <a:r>
               <a:rPr/>
-              <a:t>Part 8 · Pseudoreplication</a:t>
+              <a:t>Part 7 · Error Bars</a:t>
             </a:r>
           </a:p>
         </p:txBody>
@@ -9307,7 +11035,7 @@
             </a:pPr>
             <a:r>
               <a:rPr/>
-              <a:t>Sampling and Pseudoreplication</a:t>
+              <a:t>Error Bars and Their Interpretation</a:t>
             </a:r>
           </a:p>
         </p:txBody>
@@ -9331,100 +11059,138 @@
               <a:buNone/>
             </a:pPr>
             <a:r>
+              <a:rPr/>
+              <a:t>Error bars are graphical representations of the variability of data that show:</a:t>
+            </a:r>
+          </a:p>
+          <a:p>
+            <a:pPr lvl="0"/>
+            <a:r>
+              <a:rPr/>
+              <a:t>The </a:t>
+            </a:r>
+            <a:r>
               <a:rPr b="1"/>
-              <a:t>Pseudoreplication</a:t>
-            </a:r>
-            <a:r>
-              <a:rPr/>
-              <a:t> occurs when measurements that are not independent are analyzed as if they were independent.</a:t>
+              <a:t>precision</a:t>
+            </a:r>
+            <a:r>
+              <a:rPr/>
+              <a:t> of a measurement</a:t>
             </a:r>
           </a:p>
           <a:p>
             <a:pPr lvl="0"/>
             <a:r>
               <a:rPr/>
-              <a:t>A critical consideration in experimental design</a:t>
+              <a:t>The </a:t>
+            </a:r>
+            <a:r>
+              <a:rPr b="1"/>
+              <a:t>uncertainty</a:t>
+            </a:r>
+            <a:r>
+              <a:rPr/>
+              <a:t> around an estimate</a:t>
             </a:r>
           </a:p>
           <a:p>
             <a:pPr lvl="0"/>
             <a:r>
               <a:rPr/>
-              <a:t>Results in underestimated standard errors and confidence intervals</a:t>
+              <a:t>A </a:t>
+            </a:r>
+            <a:r>
+              <a:rPr b="1"/>
+              <a:t>confidence interval</a:t>
+            </a:r>
+            <a:r>
+              <a:rPr/>
+              <a:t> for a parameter</a:t>
+            </a:r>
+          </a:p>
+          <a:p>
+            <a:pPr lvl="0" indent="0" marL="0">
+              <a:buNone/>
+            </a:pPr>
+            <a:r>
+              <a:rPr/>
+              <a:t>Common types of error bars:</a:t>
+            </a:r>
+          </a:p>
+          <a:p>
+            <a:pPr lvl="0" indent="-342900" marL="342900">
+              <a:buAutoNum type="arabicPeriod"/>
+            </a:pPr>
+            <a:r>
+              <a:rPr b="1"/>
+              <a:t>Standard Error (SE)</a:t>
+            </a:r>
+            <a:r>
+              <a:rPr/>
+              <a:t> — shows precision of the mean</a:t>
+            </a:r>
+          </a:p>
+          <a:p>
+            <a:pPr lvl="0" indent="-342900" marL="342900">
+              <a:buAutoNum type="arabicPeriod"/>
+            </a:pPr>
+            <a:r>
+              <a:rPr b="1"/>
+              <a:t>Standard Deviation (SD)</a:t>
+            </a:r>
+            <a:r>
+              <a:rPr/>
+              <a:t> — shows variability in the data</a:t>
+            </a:r>
+          </a:p>
+          <a:p>
+            <a:pPr lvl="0" indent="-342900" marL="342900">
+              <a:buAutoNum type="arabicPeriod"/>
+            </a:pPr>
+            <a:r>
+              <a:rPr b="1"/>
+              <a:t>Confidence Interval (CI)</a:t>
+            </a:r>
+            <a:r>
+              <a:rPr/>
+              <a:t> — shows the plausible range for a parameter</a:t>
+            </a:r>
+          </a:p>
+          <a:p>
+            <a:pPr lvl="0" indent="0" marL="0">
+              <a:buNone/>
+            </a:pPr>
+            <a:r>
+              <a:rPr/>
+              <a:t>When interpreting graphs:</a:t>
             </a:r>
           </a:p>
           <a:p>
             <a:pPr lvl="0"/>
             <a:r>
               <a:rPr/>
-              <a:t>Leads to inflated Type I error rates (false positives)</a:t>
-            </a:r>
-          </a:p>
-          <a:p>
-            <a:pPr lvl="0" indent="0" marL="0">
-              <a:buNone/>
-            </a:pPr>
-            <a:r>
-              <a:rPr b="1"/>
-              <a:t>Examples of pseudoreplication:</a:t>
+              <a:t>Always check what the error bars represent</a:t>
             </a:r>
           </a:p>
           <a:p>
             <a:pPr lvl="0"/>
             <a:r>
               <a:rPr/>
-              <a:t>Measuring the same individual multiple times</a:t>
+              <a:t>Non-overlapping 95% CI bars suggest statistically significant differences</a:t>
             </a:r>
           </a:p>
           <a:p>
             <a:pPr lvl="0"/>
             <a:r>
               <a:rPr/>
-              <a:t>Treating multiple fish from the same tank as independent</a:t>
-            </a:r>
-          </a:p>
-          <a:p>
-            <a:pPr lvl="0"/>
-            <a:r>
-              <a:rPr/>
-              <a:t>Using multiple data points from a single site</a:t>
-            </a:r>
-          </a:p>
-          <a:p>
-            <a:pPr lvl="0" indent="0" marL="0">
-              <a:buNone/>
-            </a:pPr>
-            <a:r>
-              <a:rPr b="1"/>
-              <a:t>How to avoid pseudoreplication:</a:t>
-            </a:r>
-          </a:p>
-          <a:p>
-            <a:pPr lvl="0"/>
-            <a:r>
-              <a:rPr/>
-              <a:t>Identify the true experimental unit</a:t>
-            </a:r>
-          </a:p>
-          <a:p>
-            <a:pPr lvl="0"/>
-            <a:r>
-              <a:rPr/>
-              <a:t>Use appropriate statistical techniques (e.g., mixed models)</a:t>
-            </a:r>
-          </a:p>
-          <a:p>
-            <a:pPr lvl="0"/>
-            <a:r>
-              <a:rPr/>
-              <a:t>Be clear about the level of replication</a:t>
+              <a:t>Error bars help assess both statistical and practical significance</a:t>
             </a:r>
           </a:p>
         </p:txBody>
       </p:sp>
       <p:pic>
         <p:nvPicPr>
-          <p:cNvPr descr="power_and_error_lecture_files/figure-pptx/unnamed-chunk-7-1.png" id="0" name="Picture 1"/>
+          <p:cNvPr descr="power_and_error_lecture_files/figure-pptx/power-and-error-08-1.png" id="0" name="Picture 1"/>
           <p:cNvPicPr>
             <a:picLocks noGrp="1" noChangeAspect="1"/>
           </p:cNvPicPr>
@@ -9438,8 +11204,8 @@
         </p:blipFill>
         <p:spPr bwMode="auto">
           <a:xfrm>
-            <a:off x="6121400" y="1854200"/>
-            <a:ext cx="2781300" cy="2082800"/>
+            <a:off x="6121400" y="1587500"/>
+            <a:ext cx="2781300" cy="2616200"/>
           </a:xfrm>
           <a:prstGeom prst="rect">
             <a:avLst/>
@@ -9510,6 +11276,305 @@
 </file>
 
 <file path=ppt/slides/slide30.xml><?xml version="1.0" encoding="utf-8"?>
+<p:sld xmlns:a="http://schemas.openxmlformats.org/drawingml/2006/main" xmlns:r="http://schemas.openxmlformats.org/officeDocument/2006/relationships" xmlns:p="http://schemas.openxmlformats.org/presentationml/2006/main">
+  <p:cSld>
+    <p:spTree>
+      <p:nvGrpSpPr>
+        <p:cNvPr id="1" name=""/>
+        <p:cNvGrpSpPr/>
+        <p:nvPr/>
+      </p:nvGrpSpPr>
+      <p:grpSpPr>
+        <a:xfrm>
+          <a:off x="0" y="0"/>
+          <a:ext cx="0" cy="0"/>
+          <a:chOff x="0" y="0"/>
+          <a:chExt cx="0" cy="0"/>
+        </a:xfrm>
+      </p:grpSpPr>
+      <p:sp>
+        <p:nvSpPr>
+          <p:cNvPr id="2" name="Title 1"/>
+          <p:cNvSpPr>
+            <a:spLocks noGrp="1"/>
+          </p:cNvSpPr>
+          <p:nvPr>
+            <p:ph type="title"/>
+          </p:nvPr>
+        </p:nvSpPr>
+        <p:spPr>
+          <a:xfrm>
+            <a:off x="0" y="0"/>
+            <a:ext cx="9144000" cy="582780"/>
+          </a:xfrm>
+        </p:spPr>
+        <p:txBody>
+          <a:bodyPr/>
+          <a:lstStyle/>
+          <a:p>
+            <a:pPr lvl="0" indent="0" marL="0">
+              <a:buNone/>
+            </a:pPr>
+            <a:r>
+              <a:rPr/>
+              <a:t>Part 8 · Pseudoreplication</a:t>
+            </a:r>
+          </a:p>
+        </p:txBody>
+      </p:sp>
+    </p:spTree>
+  </p:cSld>
+</p:sld>
+</file>
+
+<file path=ppt/slides/slide31.xml><?xml version="1.0" encoding="utf-8"?>
+<p:sld xmlns:a="http://schemas.openxmlformats.org/drawingml/2006/main" xmlns:r="http://schemas.openxmlformats.org/officeDocument/2006/relationships" xmlns:p="http://schemas.openxmlformats.org/presentationml/2006/main">
+  <p:cSld>
+    <p:spTree>
+      <p:nvGrpSpPr>
+        <p:cNvPr id="1" name=""/>
+        <p:cNvGrpSpPr/>
+        <p:nvPr/>
+      </p:nvGrpSpPr>
+      <p:grpSpPr>
+        <a:xfrm>
+          <a:off x="0" y="0"/>
+          <a:ext cx="0" cy="0"/>
+          <a:chOff x="0" y="0"/>
+          <a:chExt cx="0" cy="0"/>
+        </a:xfrm>
+      </p:grpSpPr>
+      <p:sp>
+        <p:nvSpPr>
+          <p:cNvPr id="2" name="Title 1"/>
+          <p:cNvSpPr>
+            <a:spLocks noGrp="1"/>
+          </p:cNvSpPr>
+          <p:nvPr>
+            <p:ph type="title"/>
+          </p:nvPr>
+        </p:nvSpPr>
+        <p:spPr>
+          <a:xfrm>
+            <a:off x="0" y="0"/>
+            <a:ext cx="9144000" cy="602780"/>
+          </a:xfrm>
+          <a:solidFill>
+            <a:srgbClr val="70121D"/>
+          </a:solidFill>
+        </p:spPr>
+        <p:txBody>
+          <a:bodyPr/>
+          <a:lstStyle/>
+          <a:p>
+            <a:pPr lvl="0" indent="0" marL="0">
+              <a:buNone/>
+            </a:pPr>
+            <a:r>
+              <a:rPr/>
+              <a:t>Sampling and Pseudoreplication</a:t>
+            </a:r>
+          </a:p>
+        </p:txBody>
+      </p:sp>
+      <p:sp>
+        <p:nvSpPr>
+          <p:cNvPr id="3" name="Content Placeholder 2"/>
+          <p:cNvSpPr>
+            <a:spLocks noGrp="1"/>
+          </p:cNvSpPr>
+          <p:nvPr>
+            <p:ph idx="1" sz="half"/>
+          </p:nvPr>
+        </p:nvSpPr>
+        <p:spPr/>
+        <p:txBody>
+          <a:bodyPr/>
+          <a:lstStyle/>
+          <a:p>
+            <a:pPr lvl="0" indent="0" marL="0">
+              <a:buNone/>
+            </a:pPr>
+            <a:r>
+              <a:rPr b="1"/>
+              <a:t>Pseudoreplication</a:t>
+            </a:r>
+            <a:r>
+              <a:rPr/>
+              <a:t> occurs when measurements that are not independent are analyzed as if they were independent.</a:t>
+            </a:r>
+          </a:p>
+          <a:p>
+            <a:pPr lvl="0"/>
+            <a:r>
+              <a:rPr/>
+              <a:t>A critical consideration in experimental design</a:t>
+            </a:r>
+          </a:p>
+          <a:p>
+            <a:pPr lvl="0"/>
+            <a:r>
+              <a:rPr/>
+              <a:t>Results in underestimated standard errors and confidence intervals</a:t>
+            </a:r>
+          </a:p>
+          <a:p>
+            <a:pPr lvl="0"/>
+            <a:r>
+              <a:rPr/>
+              <a:t>Leads to inflated Type I error rates (false positives)</a:t>
+            </a:r>
+          </a:p>
+          <a:p>
+            <a:pPr lvl="0" indent="0" marL="0">
+              <a:buNone/>
+            </a:pPr>
+            <a:r>
+              <a:rPr b="1"/>
+              <a:t>Examples of pseudoreplication:</a:t>
+            </a:r>
+          </a:p>
+          <a:p>
+            <a:pPr lvl="0"/>
+            <a:r>
+              <a:rPr/>
+              <a:t>Measuring the same individual multiple times</a:t>
+            </a:r>
+          </a:p>
+          <a:p>
+            <a:pPr lvl="0"/>
+            <a:r>
+              <a:rPr/>
+              <a:t>Treating multiple fish from the same tank as independent</a:t>
+            </a:r>
+          </a:p>
+          <a:p>
+            <a:pPr lvl="0"/>
+            <a:r>
+              <a:rPr/>
+              <a:t>Using multiple data points from a single site</a:t>
+            </a:r>
+          </a:p>
+          <a:p>
+            <a:pPr lvl="0" indent="0" marL="0">
+              <a:buNone/>
+            </a:pPr>
+            <a:r>
+              <a:rPr b="1"/>
+              <a:t>How to avoid pseudoreplication:</a:t>
+            </a:r>
+          </a:p>
+          <a:p>
+            <a:pPr lvl="0"/>
+            <a:r>
+              <a:rPr/>
+              <a:t>Identify the true experimental unit</a:t>
+            </a:r>
+          </a:p>
+          <a:p>
+            <a:pPr lvl="0"/>
+            <a:r>
+              <a:rPr/>
+              <a:t>Use appropriate statistical techniques (e.g., mixed models)</a:t>
+            </a:r>
+          </a:p>
+          <a:p>
+            <a:pPr lvl="0"/>
+            <a:r>
+              <a:rPr/>
+              <a:t>Be clear about the level of replication</a:t>
+            </a:r>
+          </a:p>
+          <a:p>
+            <a:pPr lvl="0" indent="0" marL="1270000">
+              <a:buNone/>
+            </a:pPr>
+            <a:r>
+              <a:rPr sz="2000" b="1"/>
+              <a:t>Important</a:t>
+            </a:r>
+          </a:p>
+          <a:p>
+            <a:pPr lvl="0" indent="0" marL="1270000">
+              <a:buNone/>
+            </a:pPr>
+            <a:r>
+              <a:rPr sz="2000" b="1"/>
+              <a:t>We have been doing this all along</a:t>
+            </a:r>
+          </a:p>
+          <a:p>
+            <a:pPr lvl="0" indent="0" marL="1270000">
+              <a:buNone/>
+            </a:pPr>
+            <a:r>
+              <a:rPr sz="2000"/>
+              <a:t>Our pine needle data has 64 rows. Analysed as 64 independent needles it would look like a large, well-powered study. Analysed honestly — </a:t>
+            </a:r>
+            <a:r>
+              <a:rPr sz="2000" b="1"/>
+              <a:t>4 trees</a:t>
+            </a:r>
+            <a:r>
+              <a:rPr sz="2000"/>
+              <a:t> — it has 11% power unpaired, 46% paired.</a:t>
+            </a:r>
+          </a:p>
+          <a:p>
+            <a:pPr lvl="0" indent="0" marL="1270000">
+              <a:buNone/>
+            </a:pPr>
+            <a:r>
+              <a:rPr sz="2000"/>
+              <a:t>Pseudoreplication would not have made the study better. It would only have made us </a:t>
+            </a:r>
+            <a:r>
+              <a:rPr sz="2000" b="1"/>
+              <a:t>believe</a:t>
+            </a:r>
+            <a:r>
+              <a:rPr sz="2000"/>
+              <a:t> it was.</a:t>
+            </a:r>
+          </a:p>
+        </p:txBody>
+      </p:sp>
+      <p:pic>
+        <p:nvPicPr>
+          <p:cNvPr descr="power_and_error_lecture_files/figure-pptx/power-and-error-09-1.png" id="0" name="Picture 1"/>
+          <p:cNvPicPr>
+            <a:picLocks noGrp="1" noChangeAspect="1"/>
+          </p:cNvPicPr>
+          <p:nvPr/>
+        </p:nvPicPr>
+        <p:blipFill>
+          <a:blip r:embed="rId2"/>
+          <a:stretch>
+            <a:fillRect/>
+          </a:stretch>
+        </p:blipFill>
+        <p:spPr bwMode="auto">
+          <a:xfrm>
+            <a:off x="6121400" y="1854200"/>
+            <a:ext cx="2781300" cy="2082800"/>
+          </a:xfrm>
+          <a:prstGeom prst="rect">
+            <a:avLst/>
+          </a:prstGeom>
+          <a:noFill/>
+          <a:ln w="9525">
+            <a:noFill/>
+            <a:headEnd/>
+            <a:tailEnd/>
+          </a:ln>
+        </p:spPr>
+      </p:pic>
+    </p:spTree>
+  </p:cSld>
+</p:sld>
+</file>
+
+<file path=ppt/slides/slide32.xml><?xml version="1.0" encoding="utf-8"?>
 <p:sld xmlns:a="http://schemas.openxmlformats.org/drawingml/2006/main" xmlns:r="http://schemas.openxmlformats.org/officeDocument/2006/relationships" xmlns:p="http://schemas.openxmlformats.org/presentationml/2006/main">
   <p:cSld>
     <p:spTree>

--- a/docs/content/power_and_error/power_and_error_lecture.pptx
+++ b/docs/content/power_and_error/power_and_error_lecture.pptx
@@ -9435,6 +9435,41 @@
             <a:r>
               <a:rPr b="1"/>
               <a:t>whole economics of the study.</a:t>
+            </a:r>
+          </a:p>
+          <a:p>
+            <a:pPr lvl="0" indent="0" marL="0">
+              <a:buNone/>
+            </a:pPr>
+            <a:r>
+              <a:rPr/>
+              <a:t>You already calculated </a:t>
+            </a:r>
+            <a:r>
+              <a:rPr>
+                <a:latin typeface="Courier"/>
+              </a:rPr>
+              <a:t>dz</a:t>
+            </a:r>
+            <a:r>
+              <a:rPr/>
+              <a:t> in the Non-Parametric lecture — </a:t>
+            </a:r>
+            <a:r>
+              <a:rPr b="1"/>
+              <a:t>−1.36</a:t>
+            </a:r>
+            <a:r>
+              <a:rPr/>
+              <a:t>, the large effect we could not pin down. This is what that number is </a:t>
+            </a:r>
+            <a:r>
+              <a:rPr i="1"/>
+              <a:t>for</a:t>
+            </a:r>
+            <a:r>
+              <a:rPr/>
+              <a:t>.</a:t>
             </a:r>
           </a:p>
           <a:p>

--- a/docs/content/power_and_error/power_and_error_lecture.pptx
+++ b/docs/content/power_and_error/power_and_error_lecture.pptx
@@ -3650,6 +3650,16 @@
               </a:rPr>
               <a:t>(</a:t>
             </a:r>
+            <a:br/>
+            <a:r>
+              <a:rPr>
+                <a:solidFill>
+                  <a:srgbClr val="003B4F"/>
+                </a:solidFill>
+                <a:latin typeface="Courier"/>
+              </a:rPr>
+              <a:t>    </a:t>
+            </a:r>
             <a:r>
               <a:rPr>
                 <a:solidFill>
@@ -3730,7 +3740,7 @@
                 </a:solidFill>
                 <a:latin typeface="Courier"/>
               </a:rPr>
-              <a:t>            </a:t>
+              <a:t>    </a:t>
             </a:r>
             <a:r>
               <a:rPr>
@@ -3759,14 +3769,15 @@
               </a:rPr>
               <a:t>"drop"</a:t>
             </a:r>
-            <a:r>
-              <a:rPr>
-                <a:solidFill>
-                  <a:srgbClr val="003B4F"/>
-                </a:solidFill>
-                <a:latin typeface="Courier"/>
-              </a:rPr>
-              <a:t>)</a:t>
+            <a:br/>
+            <a:r>
+              <a:rPr>
+                <a:solidFill>
+                  <a:srgbClr val="003B4F"/>
+                </a:solidFill>
+                <a:latin typeface="Courier"/>
+              </a:rPr>
+              <a:t>  )</a:t>
             </a:r>
             <a:br/>
             <a:br/>
@@ -4018,14 +4029,15 @@
               </a:rPr>
               <a:t>%&gt;%</a:t>
             </a:r>
-            <a:r>
-              <a:rPr>
-                <a:solidFill>
-                  <a:srgbClr val="003B4F"/>
-                </a:solidFill>
-                <a:latin typeface="Courier"/>
-              </a:rPr>
-              <a:t> </a:t>
+            <a:br/>
+            <a:r>
+              <a:rPr>
+                <a:solidFill>
+                  <a:srgbClr val="003B4F"/>
+                </a:solidFill>
+                <a:latin typeface="Courier"/>
+              </a:rPr>
+              <a:t>  </a:t>
             </a:r>
             <a:r>
               <a:rPr>
@@ -4054,14 +4066,15 @@
               </a:rPr>
               <a:t>%&gt;%</a:t>
             </a:r>
-            <a:r>
-              <a:rPr>
-                <a:solidFill>
-                  <a:srgbClr val="003B4F"/>
-                </a:solidFill>
-                <a:latin typeface="Courier"/>
-              </a:rPr>
-              <a:t> </a:t>
+            <a:br/>
+            <a:r>
+              <a:rPr>
+                <a:solidFill>
+                  <a:srgbClr val="003B4F"/>
+                </a:solidFill>
+                <a:latin typeface="Courier"/>
+              </a:rPr>
+              <a:t>  </a:t>
             </a:r>
             <a:r>
               <a:rPr>
@@ -4134,6 +4147,16 @@
                 <a:hlinkClick r:id="rId3"/>
               </a:rPr>
               <a:t>📥 Download the lizard data</a:t>
+            </a:r>
+            <a:r>
+              <a:rPr/>
+              <a:t> </a:t>
+            </a:r>
+            <a:r>
+              <a:rPr>
+                <a:hlinkClick r:id="rId4"/>
+              </a:rPr>
+              <a:t>📥 Script skeleton (.R)</a:t>
             </a:r>
           </a:p>
         </p:txBody>
@@ -4871,6 +4894,16 @@
               </a:rPr>
               <a:t>(</a:t>
             </a:r>
+            <a:br/>
+            <a:r>
+              <a:rPr>
+                <a:solidFill>
+                  <a:srgbClr val="003B4F"/>
+                </a:solidFill>
+                <a:latin typeface="Courier"/>
+              </a:rPr>
+              <a:t>  </a:t>
+            </a:r>
             <a:r>
               <a:rPr>
                 <a:solidFill>
@@ -4905,7 +4938,17 @@
                 </a:solidFill>
                 <a:latin typeface="Courier"/>
               </a:rPr>
-              <a:t>Cohens_d, </a:t>
+              <a:t>Cohens_d,</a:t>
+            </a:r>
+            <a:br/>
+            <a:r>
+              <a:rPr>
+                <a:solidFill>
+                  <a:srgbClr val="003B4F"/>
+                </a:solidFill>
+                <a:latin typeface="Courier"/>
+              </a:rPr>
+              <a:t>  </a:t>
             </a:r>
             <a:r>
               <a:rPr>
@@ -4951,7 +4994,7 @@
                 </a:solidFill>
                 <a:latin typeface="Courier"/>
               </a:rPr>
-              <a:t>           </a:t>
+              <a:t>  </a:t>
             </a:r>
             <a:r>
               <a:rPr>
@@ -4987,7 +5030,17 @@
                 </a:solidFill>
                 <a:latin typeface="Courier"/>
               </a:rPr>
-              <a:t>, </a:t>
+              <a:t>,</a:t>
+            </a:r>
+            <a:br/>
+            <a:r>
+              <a:rPr>
+                <a:solidFill>
+                  <a:srgbClr val="003B4F"/>
+                </a:solidFill>
+                <a:latin typeface="Courier"/>
+              </a:rPr>
+              <a:t>  </a:t>
             </a:r>
             <a:r>
               <a:rPr>
@@ -5016,6 +5069,7 @@
               </a:rPr>
               <a:t>"two.sample"</a:t>
             </a:r>
+            <a:br/>
             <a:r>
               <a:rPr>
                 <a:solidFill>
@@ -5050,11 +5104,30 @@
             </a:pPr>
             <a:r>
               <a:rPr b="1"/>
-              <a:t>44 trees per side.</a:t>
-            </a:r>
-            <a:r>
-              <a:rPr/>
-              <a:t> We collected four.</a:t>
+              <a:t>44 trees per side</a:t>
+            </a:r>
+            <a:r>
+              <a:rPr/>
+              <a:t> (always round </a:t>
+            </a:r>
+            <a:r>
+              <a:rPr>
+                <a:latin typeface="Courier"/>
+              </a:rPr>
+              <a:t>n</a:t>
+            </a:r>
+            <a:r>
+              <a:rPr/>
+              <a:t> up). We collected 4.</a:t>
+            </a:r>
+          </a:p>
+          <a:p>
+            <a:pPr lvl="0" indent="0" marL="0">
+              <a:buNone/>
+            </a:pPr>
+            <a:r>
+              <a:rPr/>
+              <a:t>And that d came from just 4 trees — its 95% CI (shady − sunny) runs from -2.01 to 0.84, which includes zero. An a priori n is only as good as the effect size you feed it; published values or a conservative guess are often safer than a tiny pilot.</a:t>
             </a:r>
           </a:p>
           <a:p>
@@ -5679,6 +5752,16 @@
               </a:rPr>
               <a:t>(</a:t>
             </a:r>
+            <a:br/>
+            <a:r>
+              <a:rPr>
+                <a:solidFill>
+                  <a:srgbClr val="003B4F"/>
+                </a:solidFill>
+                <a:latin typeface="Courier"/>
+              </a:rPr>
+              <a:t>  </a:t>
+            </a:r>
             <a:r>
               <a:rPr>
                 <a:solidFill>
@@ -5777,7 +5860,7 @@
                 </a:solidFill>
                 <a:latin typeface="Courier"/>
               </a:rPr>
-              <a:t>             </a:t>
+              <a:t>  </a:t>
             </a:r>
             <a:r>
               <a:rPr>
@@ -5877,7 +5960,7 @@
                 </a:solidFill>
                 <a:latin typeface="Courier"/>
               </a:rPr>
-              <a:t>             </a:t>
+              <a:t>  </a:t>
             </a:r>
             <a:r>
               <a:rPr>
@@ -5923,7 +6006,7 @@
                 </a:solidFill>
                 <a:latin typeface="Courier"/>
               </a:rPr>
-              <a:t>             </a:t>
+              <a:t>  </a:t>
             </a:r>
             <a:r>
               <a:rPr>
@@ -5952,6 +6035,7 @@
               </a:rPr>
               <a:t>0.05</a:t>
             </a:r>
+            <a:br/>
             <a:r>
               <a:rPr>
                 <a:solidFill>
@@ -6511,6 +6595,16 @@
               </a:rPr>
               <a:t>(</a:t>
             </a:r>
+            <a:br/>
+            <a:r>
+              <a:rPr>
+                <a:solidFill>
+                  <a:srgbClr val="003B4F"/>
+                </a:solidFill>
+                <a:latin typeface="Courier"/>
+              </a:rPr>
+              <a:t>  </a:t>
+            </a:r>
             <a:r>
               <a:rPr>
                 <a:solidFill>
@@ -6545,7 +6639,17 @@
                 </a:solidFill>
                 <a:latin typeface="Courier"/>
               </a:rPr>
-              <a:t>, </a:t>
+              <a:t>,</a:t>
+            </a:r>
+            <a:br/>
+            <a:r>
+              <a:rPr>
+                <a:solidFill>
+                  <a:srgbClr val="003B4F"/>
+                </a:solidFill>
+                <a:latin typeface="Courier"/>
+              </a:rPr>
+              <a:t>  </a:t>
             </a:r>
             <a:r>
               <a:rPr>
@@ -6591,7 +6695,7 @@
                 </a:solidFill>
                 <a:latin typeface="Courier"/>
               </a:rPr>
-              <a:t>           </a:t>
+              <a:t>  </a:t>
             </a:r>
             <a:r>
               <a:rPr>
@@ -6627,7 +6731,17 @@
                 </a:solidFill>
                 <a:latin typeface="Courier"/>
               </a:rPr>
-              <a:t>, </a:t>
+              <a:t>,</a:t>
+            </a:r>
+            <a:br/>
+            <a:r>
+              <a:rPr>
+                <a:solidFill>
+                  <a:srgbClr val="003B4F"/>
+                </a:solidFill>
+                <a:latin typeface="Courier"/>
+              </a:rPr>
+              <a:t>  </a:t>
             </a:r>
             <a:r>
               <a:rPr>
@@ -6656,6 +6770,7 @@
               </a:rPr>
               <a:t>"two.sample"</a:t>
             </a:r>
+            <a:br/>
             <a:r>
               <a:rPr>
                 <a:solidFill>
@@ -6978,17 +7093,7 @@
                 </a:solidFill>
                 <a:latin typeface="Courier"/>
               </a:rPr>
-              <a:t>Cohens_d,</a:t>
-            </a:r>
-            <a:br/>
-            <a:r>
-              <a:rPr>
-                <a:solidFill>
-                  <a:srgbClr val="003B4F"/>
-                </a:solidFill>
-                <a:latin typeface="Courier"/>
-              </a:rPr>
-              <a:t>           </a:t>
+              <a:t>Cohens_d, </a:t>
             </a:r>
             <a:r>
               <a:rPr>
@@ -7244,6 +7349,16 @@
               </a:rPr>
               <a:t>(</a:t>
             </a:r>
+            <a:br/>
+            <a:r>
+              <a:rPr>
+                <a:solidFill>
+                  <a:srgbClr val="003B4F"/>
+                </a:solidFill>
+                <a:latin typeface="Courier"/>
+              </a:rPr>
+              <a:t>  </a:t>
+            </a:r>
             <a:r>
               <a:rPr>
                 <a:solidFill>
@@ -7278,7 +7393,17 @@
                 </a:solidFill>
                 <a:latin typeface="Courier"/>
               </a:rPr>
-              <a:t>Cohens_d, </a:t>
+              <a:t>Cohens_d,</a:t>
+            </a:r>
+            <a:br/>
+            <a:r>
+              <a:rPr>
+                <a:solidFill>
+                  <a:srgbClr val="003B4F"/>
+                </a:solidFill>
+                <a:latin typeface="Courier"/>
+              </a:rPr>
+              <a:t>  </a:t>
             </a:r>
             <a:r>
               <a:rPr>
@@ -7324,7 +7449,7 @@
                 </a:solidFill>
                 <a:latin typeface="Courier"/>
               </a:rPr>
-              <a:t>           </a:t>
+              <a:t>  </a:t>
             </a:r>
             <a:r>
               <a:rPr>
@@ -7360,7 +7485,17 @@
                 </a:solidFill>
                 <a:latin typeface="Courier"/>
               </a:rPr>
-              <a:t>, </a:t>
+              <a:t>,</a:t>
+            </a:r>
+            <a:br/>
+            <a:r>
+              <a:rPr>
+                <a:solidFill>
+                  <a:srgbClr val="003B4F"/>
+                </a:solidFill>
+                <a:latin typeface="Courier"/>
+              </a:rPr>
+              <a:t>  </a:t>
             </a:r>
             <a:r>
               <a:rPr>
@@ -7389,6 +7524,7 @@
               </a:rPr>
               <a:t>"paired"</a:t>
             </a:r>
+            <a:br/>
             <a:r>
               <a:rPr>
                 <a:solidFill>
@@ -7548,7 +7684,7 @@
                       </a:pPr>
                       <a:r>
                         <a:rPr/>
-                        <a:t>44 per side</a:t>
+                        <a:t>44 per side (88 trees)</a:t>
                       </a:r>
                     </a:p>
                   </a:txBody>
@@ -8773,8 +8909,8 @@
                 <a:tableStyleId>{5C22544A-7EE6-4342-B048-85BDC9FD1C3A}</a:tableStyleId>
               </a:tblPr>
               <a:tblGrid>
-                <a:gridCol w="1117600"/>
-                <a:gridCol w="1676400"/>
+                <a:gridCol w="1155700"/>
+                <a:gridCol w="1638300"/>
                 <a:gridCol w="1638300"/>
               </a:tblGrid>
               <a:tr h="0">
@@ -9195,18 +9331,18 @@
             </a:r>
             <a:r>
               <a:rPr/>
-              <a:t>, shifted by the real effect</a:t>
+              <a:t>, shifted by an assumed effect size</a:t>
             </a:r>
           </a:p>
           <a:p>
             <a:pPr lvl="0"/>
             <a:r>
               <a:rPr b="1"/>
-              <a:t>Red area (α)</a:t>
-            </a:r>
-            <a:r>
-              <a:rPr/>
-              <a:t> — null curve beyond the critical value: Type I error</a:t>
+              <a:t>Red areas (α/2 each)</a:t>
+            </a:r>
+            <a:r>
+              <a:rPr/>
+              <a:t> — both tails of the null curve beyond the critical values: Type I error, α total</a:t>
             </a:r>
           </a:p>
           <a:p>
@@ -9217,18 +9353,18 @@
             </a:r>
             <a:r>
               <a:rPr/>
-              <a:t> — alternative curve inside the acceptance region: Type II error</a:t>
+              <a:t> — alternative curve between the critical values: Type II error</a:t>
             </a:r>
           </a:p>
           <a:p>
             <a:pPr lvl="0"/>
             <a:r>
               <a:rPr b="1"/>
-              <a:t>Power</a:t>
-            </a:r>
-            <a:r>
-              <a:rPr/>
-              <a:t> is the rest of the green curve — beyond the critical value</a:t>
+              <a:t>Power (1 − β)</a:t>
+            </a:r>
+            <a:r>
+              <a:rPr/>
+              <a:t> — the rest of the green curve, beyond the critical value</a:t>
             </a:r>
           </a:p>
           <a:p>
@@ -9237,7 +9373,24 @@
             </a:pPr>
             <a:r>
               <a:rPr/>
-              <a:t>Moving the critical value trades one error for the other. For a fixed sample size, </a:t>
+              <a:t>You live on only </a:t>
+            </a:r>
+            <a:r>
+              <a:rPr b="1"/>
+              <a:t>one</a:t>
+            </a:r>
+            <a:r>
+              <a:rPr/>
+              <a:t> curve — you just don’t know which. α comes from the black curve and β from the green one, so α + β need not equal 1.</a:t>
+            </a:r>
+          </a:p>
+          <a:p>
+            <a:pPr lvl="0" indent="0" marL="0">
+              <a:buNone/>
+            </a:pPr>
+            <a:r>
+              <a:rPr/>
+              <a:t>Moving the critical values trades one error for the other. For a fixed sample size, </a:t>
             </a:r>
             <a:r>
               <a:rPr b="1"/>
